--- a/course_materials/weeks/week_10/week_10_mql_document_modeling.pptx
+++ b/course_materials/weeks/week_10/week_10_mql_document_modeling.pptx
@@ -2,40 +2,40 @@
 <file path=ppt/presentation.xml><?xml version="1.0" encoding="utf-8"?>
 <p:presentation xmlns:p="http://schemas.openxmlformats.org/presentationml/2006/main">
   <p:sldMasterIdLst>
-    <p:sldMasterId xmlns:r="http://schemas.openxmlformats.org/officeDocument/2006/relationships" id="2147483648" r:id="R4ac4b6d0a39f4c47"/>
+    <p:sldMasterId xmlns:r="http://schemas.openxmlformats.org/officeDocument/2006/relationships" id="2147483648" r:id="R19f9d5733bbe4a66"/>
   </p:sldMasterIdLst>
   <p:notesMasterIdLst>
-    <p:notesMasterId xmlns:r="http://schemas.openxmlformats.org/officeDocument/2006/relationships" r:id="Ra2bf813861484321"/>
+    <p:notesMasterId xmlns:r="http://schemas.openxmlformats.org/officeDocument/2006/relationships" r:id="R51b9fddf51d34dbb"/>
   </p:notesMasterIdLst>
   <p:sldIdLst>
-    <p:sldId xmlns:r="http://schemas.openxmlformats.org/officeDocument/2006/relationships" id="256" r:id="Rf7ada16fe6ff4a0c"/>
-    <p:sldId xmlns:r="http://schemas.openxmlformats.org/officeDocument/2006/relationships" id="257" r:id="R33fb853189234696"/>
-    <p:sldId xmlns:r="http://schemas.openxmlformats.org/officeDocument/2006/relationships" id="258" r:id="Re12b996fee024f00"/>
-    <p:sldId xmlns:r="http://schemas.openxmlformats.org/officeDocument/2006/relationships" id="259" r:id="Rdb725a42665d4070"/>
-    <p:sldId xmlns:r="http://schemas.openxmlformats.org/officeDocument/2006/relationships" id="260" r:id="R479e028bc76347e7"/>
-    <p:sldId xmlns:r="http://schemas.openxmlformats.org/officeDocument/2006/relationships" id="261" r:id="Racb2866683a444f8"/>
-    <p:sldId xmlns:r="http://schemas.openxmlformats.org/officeDocument/2006/relationships" id="262" r:id="Rb5609bd2e54f417b"/>
-    <p:sldId xmlns:r="http://schemas.openxmlformats.org/officeDocument/2006/relationships" id="263" r:id="R11e260e4028a44f6"/>
-    <p:sldId xmlns:r="http://schemas.openxmlformats.org/officeDocument/2006/relationships" id="264" r:id="Rae0833ece4eb451f"/>
-    <p:sldId xmlns:r="http://schemas.openxmlformats.org/officeDocument/2006/relationships" id="265" r:id="R26722d4e5ea24cd0"/>
-    <p:sldId xmlns:r="http://schemas.openxmlformats.org/officeDocument/2006/relationships" id="266" r:id="R4cf96cdd416a4bd3"/>
-    <p:sldId xmlns:r="http://schemas.openxmlformats.org/officeDocument/2006/relationships" id="267" r:id="Re0636b8f57934919"/>
-    <p:sldId xmlns:r="http://schemas.openxmlformats.org/officeDocument/2006/relationships" id="268" r:id="R08b6365f47804a05"/>
-    <p:sldId xmlns:r="http://schemas.openxmlformats.org/officeDocument/2006/relationships" id="269" r:id="Ra9b802dc9fb54a2f"/>
-    <p:sldId xmlns:r="http://schemas.openxmlformats.org/officeDocument/2006/relationships" id="270" r:id="R76842de4f0c34236"/>
-    <p:sldId xmlns:r="http://schemas.openxmlformats.org/officeDocument/2006/relationships" id="271" r:id="R8c0cdfcd94d44cdd"/>
-    <p:sldId xmlns:r="http://schemas.openxmlformats.org/officeDocument/2006/relationships" id="272" r:id="R37bd6405202f4ab1"/>
-    <p:sldId xmlns:r="http://schemas.openxmlformats.org/officeDocument/2006/relationships" id="273" r:id="R57a64a5461504e78"/>
-    <p:sldId xmlns:r="http://schemas.openxmlformats.org/officeDocument/2006/relationships" id="274" r:id="Rf258051407964152"/>
-    <p:sldId xmlns:r="http://schemas.openxmlformats.org/officeDocument/2006/relationships" id="275" r:id="Ra039473ef42c4f93"/>
-    <p:sldId xmlns:r="http://schemas.openxmlformats.org/officeDocument/2006/relationships" id="276" r:id="R008c583f55794e6e"/>
-    <p:sldId xmlns:r="http://schemas.openxmlformats.org/officeDocument/2006/relationships" id="277" r:id="R7d7d4815c1d74831"/>
-    <p:sldId xmlns:r="http://schemas.openxmlformats.org/officeDocument/2006/relationships" id="278" r:id="R8f94859560da4c31"/>
-    <p:sldId xmlns:r="http://schemas.openxmlformats.org/officeDocument/2006/relationships" id="279" r:id="Re86a5664bc6941b5"/>
-    <p:sldId xmlns:r="http://schemas.openxmlformats.org/officeDocument/2006/relationships" id="280" r:id="R0541df6121984db6"/>
-    <p:sldId xmlns:r="http://schemas.openxmlformats.org/officeDocument/2006/relationships" id="281" r:id="Red7faf1c915c4d62"/>
-    <p:sldId xmlns:r="http://schemas.openxmlformats.org/officeDocument/2006/relationships" id="282" r:id="R7af50e8f37c94a37"/>
-    <p:sldId xmlns:r="http://schemas.openxmlformats.org/officeDocument/2006/relationships" id="283" r:id="R3739602548ff45b8"/>
+    <p:sldId xmlns:r="http://schemas.openxmlformats.org/officeDocument/2006/relationships" id="256" r:id="Rfeeb91b33c604aa8"/>
+    <p:sldId xmlns:r="http://schemas.openxmlformats.org/officeDocument/2006/relationships" id="257" r:id="R2089f1f47e6d4bb5"/>
+    <p:sldId xmlns:r="http://schemas.openxmlformats.org/officeDocument/2006/relationships" id="258" r:id="Raa7433902a8a44db"/>
+    <p:sldId xmlns:r="http://schemas.openxmlformats.org/officeDocument/2006/relationships" id="259" r:id="Rf0c1b71de6b146e6"/>
+    <p:sldId xmlns:r="http://schemas.openxmlformats.org/officeDocument/2006/relationships" id="260" r:id="R0cedf6b419e4417f"/>
+    <p:sldId xmlns:r="http://schemas.openxmlformats.org/officeDocument/2006/relationships" id="261" r:id="Rf6bbf512f09b44f6"/>
+    <p:sldId xmlns:r="http://schemas.openxmlformats.org/officeDocument/2006/relationships" id="262" r:id="Rb18033746b294641"/>
+    <p:sldId xmlns:r="http://schemas.openxmlformats.org/officeDocument/2006/relationships" id="263" r:id="R17c845633b274c3f"/>
+    <p:sldId xmlns:r="http://schemas.openxmlformats.org/officeDocument/2006/relationships" id="264" r:id="Rf23e3f3b50e24685"/>
+    <p:sldId xmlns:r="http://schemas.openxmlformats.org/officeDocument/2006/relationships" id="265" r:id="Rfca89b5aa55144e5"/>
+    <p:sldId xmlns:r="http://schemas.openxmlformats.org/officeDocument/2006/relationships" id="266" r:id="R768c7e1f1b2e43f9"/>
+    <p:sldId xmlns:r="http://schemas.openxmlformats.org/officeDocument/2006/relationships" id="267" r:id="R6897877e390f4fe1"/>
+    <p:sldId xmlns:r="http://schemas.openxmlformats.org/officeDocument/2006/relationships" id="268" r:id="Raaf988fc55e242a7"/>
+    <p:sldId xmlns:r="http://schemas.openxmlformats.org/officeDocument/2006/relationships" id="269" r:id="R4fba0e473b494fda"/>
+    <p:sldId xmlns:r="http://schemas.openxmlformats.org/officeDocument/2006/relationships" id="270" r:id="Rfc13dfcba3854b8a"/>
+    <p:sldId xmlns:r="http://schemas.openxmlformats.org/officeDocument/2006/relationships" id="271" r:id="R1f5524a3f1bc4ea7"/>
+    <p:sldId xmlns:r="http://schemas.openxmlformats.org/officeDocument/2006/relationships" id="272" r:id="R2b75adbe05214576"/>
+    <p:sldId xmlns:r="http://schemas.openxmlformats.org/officeDocument/2006/relationships" id="273" r:id="R04ee5c6db2ef4cc8"/>
+    <p:sldId xmlns:r="http://schemas.openxmlformats.org/officeDocument/2006/relationships" id="274" r:id="Rfb96e83731a3456a"/>
+    <p:sldId xmlns:r="http://schemas.openxmlformats.org/officeDocument/2006/relationships" id="275" r:id="R1b439d0ff9c242ae"/>
+    <p:sldId xmlns:r="http://schemas.openxmlformats.org/officeDocument/2006/relationships" id="276" r:id="Rb9e8c2b4036f45dd"/>
+    <p:sldId xmlns:r="http://schemas.openxmlformats.org/officeDocument/2006/relationships" id="277" r:id="R8b463b4af51942fc"/>
+    <p:sldId xmlns:r="http://schemas.openxmlformats.org/officeDocument/2006/relationships" id="278" r:id="Rd42bc776f039447c"/>
+    <p:sldId xmlns:r="http://schemas.openxmlformats.org/officeDocument/2006/relationships" id="279" r:id="Rc221502be43a4271"/>
+    <p:sldId xmlns:r="http://schemas.openxmlformats.org/officeDocument/2006/relationships" id="280" r:id="R26622699a8c14302"/>
+    <p:sldId xmlns:r="http://schemas.openxmlformats.org/officeDocument/2006/relationships" id="281" r:id="R1d68ae5902c5481b"/>
+    <p:sldId xmlns:r="http://schemas.openxmlformats.org/officeDocument/2006/relationships" id="282" r:id="Rb582db59952e4094"/>
+    <p:sldId xmlns:r="http://schemas.openxmlformats.org/officeDocument/2006/relationships" id="283" r:id="R3f91c04cf8d74289"/>
   </p:sldIdLst>
   <p:sldSz cx="12192000" cy="6858000"/>
   <p:notesSz cx="6858000" cy="9144000"/>
@@ -1414,7 +1414,27 @@
           <a:lstStyle xmlns:a="http://schemas.openxmlformats.org/drawingml/2006/main"/>
           <a:p xmlns:a="http://schemas.openxmlformats.org/drawingml/2006/main">
             <a:r>
-              <a:t>The first lab stays in one notebook. Begin with its worked query and then change one filter so it answers a different question about the six tickets. Add one useful field to the projection. Choose a returned ticket and explain why it belongs in that answer.</a:t>
+              <a:t>The first lab stays in one notebook. We have used SQL and MongoDB to ask the same question about the same six tickets. Both results identified ticket 1001 as active and high priority. The syntax changed, but we still had to decide which records belong in the answer and which fields to show.</a:t>
+            </a:r>
+          </a:p>
+          <a:p xmlns:a="http://schemas.openxmlformats.org/drawingml/2006/main">
+            <a:r>
+              <a:t/>
+            </a:r>
+          </a:p>
+          <a:p xmlns:a="http://schemas.openxmlformats.org/drawingml/2006/main">
+            <a:r>
+              <a:t>Your question is now different. The lighting and sanitation crews want their active requests, newest first, with priority displayed. A medium-priority request still needs work. Keep the category condition in the starter, add the active-status condition, and add priority to the projection. Carrying over the demonstration's high-or-urgent condition would incorrectly hide some work.</a:t>
+            </a:r>
+          </a:p>
+          <a:p xmlns:a="http://schemas.openxmlformats.org/drawingml/2006/main">
+            <a:r>
+              <a:t/>
+            </a:r>
+          </a:p>
+          <a:p xmlns:a="http://schemas.openxmlformats.org/drawingml/2006/main">
+            <a:r>
+              <a:t>Predict the order from the actual opening dates before running the query. The completed queue has tickets 1006, 1002, and 1001, in that order. Ticket 1005 belongs to sanitation and has high priority, but it is resolved. Including it would mix completed work with the crew's current queue. This is why a query can be syntactically correct yet answer a different operational question.</a:t>
             </a:r>
           </a:p>
           <a:p xmlns:a="http://schemas.openxmlformats.org/drawingml/2006/main">
@@ -3474,7 +3494,7 @@
           </a:p>
           <a:p xmlns:a="http://schemas.openxmlformats.org/drawingml/2006/main">
             <a:r>
-              <a:t>For your own query change, choose a question that this fixture can answer and predict at least one returned ticket. The useful check is whether the selected fields and records answer that question, not whether the cell merely finishes without an exception.</a:t>
+              <a:t>In the notebook, we compare this result with a SQL query over the same six tickets. SQL returns an ID and status in a row. MongoDB returns those fields in a document. Both identify ticket 1001. Your lab changes the question to an active lighting-and-sanitation queue, including medium-priority work. We will change the filter to match that requirement and keep priority visible in the output.</a:t>
             </a:r>
           </a:p>
           <a:p xmlns:a="http://schemas.openxmlformats.org/drawingml/2006/main">
@@ -3812,7 +3832,7 @@
   </p:cSld>
   <p:clrMap bg1="lt1" tx1="dk1" bg2="lt2" tx2="dk2" accent1="accent1" accent2="accent2" accent3="accent3" accent4="accent4" accent5="accent5" accent6="accent6" hlink="hlink" folHlink="folHlink"/>
   <p:sldLayoutIdLst>
-    <p:sldLayoutId xmlns:r="http://schemas.openxmlformats.org/officeDocument/2006/relationships" id="2147483649" r:id="R26fac4603bd241c4"/>
+    <p:sldLayoutId xmlns:r="http://schemas.openxmlformats.org/officeDocument/2006/relationships" id="2147483649" r:id="Rea70f78bf7454559"/>
   </p:sldLayoutIdLst>
   <p:txStyles>
     <p:titleStyle>
@@ -4363,7 +4383,7 @@
           <p:cNvPr id="7" name="eyebrow">
             <a:extLst xmlns:a="http://schemas.openxmlformats.org/drawingml/2006/main">
               <a:ext uri="{FF2B5EF4-FFF2-40B4-BE49-F238E27FC236}">
-                <a16:creationId xmlns:a16="http://schemas.microsoft.com/office/drawing/2014/main" id="{58524286-4917-4832-B6A6-1C5AD1AE2E3F}"/>
+                <a16:creationId xmlns:a16="http://schemas.microsoft.com/office/drawing/2014/main" id="{D4752553-744C-4D20-9A7C-7541AA5B099A}"/>
               </a:ext>
             </a:extLst>
           </p:cNvPr>
@@ -4420,7 +4440,7 @@
           <p:cNvPr id="2" name="slide-title">
             <a:extLst xmlns:a="http://schemas.openxmlformats.org/drawingml/2006/main">
               <a:ext uri="{FF2B5EF4-FFF2-40B4-BE49-F238E27FC236}">
-                <a16:creationId xmlns:a16="http://schemas.microsoft.com/office/drawing/2014/main" id="{00D3A8A3-0015-40DE-B804-E8D44BDAF171}"/>
+                <a16:creationId xmlns:a16="http://schemas.microsoft.com/office/drawing/2014/main" id="{A52FE0B5-CCF2-4195-9B31-6B8B478F66B4}"/>
               </a:ext>
             </a:extLst>
           </p:cNvPr>
@@ -4477,7 +4497,7 @@
           <p:cNvPr id="3" name="">
             <a:extLst xmlns:a="http://schemas.openxmlformats.org/drawingml/2006/main">
               <a:ext uri="{FF2B5EF4-FFF2-40B4-BE49-F238E27FC236}">
-                <a16:creationId xmlns:a16="http://schemas.microsoft.com/office/drawing/2014/main" id="{1B1C0259-29A0-41A3-8F10-FA32544DB5DC}"/>
+                <a16:creationId xmlns:a16="http://schemas.microsoft.com/office/drawing/2014/main" id="{04BD63DC-106A-4664-919A-456B276E21FC}"/>
               </a:ext>
             </a:extLst>
           </p:cNvPr>
@@ -4509,7 +4529,7 @@
           <p:cNvPr id="4" name="slide-number">
             <a:extLst xmlns:a="http://schemas.openxmlformats.org/drawingml/2006/main">
               <a:ext uri="{FF2B5EF4-FFF2-40B4-BE49-F238E27FC236}">
-                <a16:creationId xmlns:a16="http://schemas.microsoft.com/office/drawing/2014/main" id="{13F192EE-60D4-4A0D-B770-04E2B428E4AB}"/>
+                <a16:creationId xmlns:a16="http://schemas.microsoft.com/office/drawing/2014/main" id="{9BB82BFA-67B7-4147-A139-648A6DFDEC10}"/>
               </a:ext>
             </a:extLst>
           </p:cNvPr>
@@ -4566,7 +4586,7 @@
           <p:cNvPr id="5" name="opening">
             <a:extLst xmlns:a="http://schemas.openxmlformats.org/drawingml/2006/main">
               <a:ext uri="{FF2B5EF4-FFF2-40B4-BE49-F238E27FC236}">
-                <a16:creationId xmlns:a16="http://schemas.microsoft.com/office/drawing/2014/main" id="{C1F43E05-A194-43A8-B811-AE39DCD6B135}"/>
+                <a16:creationId xmlns:a16="http://schemas.microsoft.com/office/drawing/2014/main" id="{69B40826-C64C-47FA-85AA-1D963DB02980}"/>
               </a:ext>
             </a:extLst>
           </p:cNvPr>
@@ -4646,7 +4666,7 @@
           <p:cNvPr id="6" name="arc">
             <a:extLst xmlns:a="http://schemas.openxmlformats.org/drawingml/2006/main">
               <a:ext uri="{FF2B5EF4-FFF2-40B4-BE49-F238E27FC236}">
-                <a16:creationId xmlns:a16="http://schemas.microsoft.com/office/drawing/2014/main" id="{B0136779-0319-4F73-80E6-EE5F406873D8}"/>
+                <a16:creationId xmlns:a16="http://schemas.microsoft.com/office/drawing/2014/main" id="{EA351199-C5B7-452D-B0C1-5CF26B5B8E20}"/>
               </a:ext>
             </a:extLst>
           </p:cNvPr>
@@ -4755,7 +4775,7 @@
           <p:cNvPr id="9" name="eyebrow">
             <a:extLst xmlns:a="http://schemas.openxmlformats.org/drawingml/2006/main">
               <a:ext uri="{FF2B5EF4-FFF2-40B4-BE49-F238E27FC236}">
-                <a16:creationId xmlns:a16="http://schemas.microsoft.com/office/drawing/2014/main" id="{F20768C7-32DE-4E66-9919-7A3313439206}"/>
+                <a16:creationId xmlns:a16="http://schemas.microsoft.com/office/drawing/2014/main" id="{37940220-6A54-4A7F-928D-7C037B7D4DAE}"/>
               </a:ext>
             </a:extLst>
           </p:cNvPr>
@@ -4812,7 +4832,7 @@
           <p:cNvPr id="2" name="slide-title">
             <a:extLst xmlns:a="http://schemas.openxmlformats.org/drawingml/2006/main">
               <a:ext uri="{FF2B5EF4-FFF2-40B4-BE49-F238E27FC236}">
-                <a16:creationId xmlns:a16="http://schemas.microsoft.com/office/drawing/2014/main" id="{5A747965-1C6D-4C63-8D8A-F566E0FBE582}"/>
+                <a16:creationId xmlns:a16="http://schemas.microsoft.com/office/drawing/2014/main" id="{5EDE076A-182E-4E4B-97DD-A4B2F71FC7F5}"/>
               </a:ext>
             </a:extLst>
           </p:cNvPr>
@@ -4869,7 +4889,7 @@
           <p:cNvPr id="3" name="">
             <a:extLst xmlns:a="http://schemas.openxmlformats.org/drawingml/2006/main">
               <a:ext uri="{FF2B5EF4-FFF2-40B4-BE49-F238E27FC236}">
-                <a16:creationId xmlns:a16="http://schemas.microsoft.com/office/drawing/2014/main" id="{82BD84C1-4428-4B10-BFAD-E13046F5FCC3}"/>
+                <a16:creationId xmlns:a16="http://schemas.microsoft.com/office/drawing/2014/main" id="{F46ECFA1-9DE8-4C28-9619-607806FF7115}"/>
               </a:ext>
             </a:extLst>
           </p:cNvPr>
@@ -4901,7 +4921,7 @@
           <p:cNvPr id="4" name="slide-number">
             <a:extLst xmlns:a="http://schemas.openxmlformats.org/drawingml/2006/main">
               <a:ext uri="{FF2B5EF4-FFF2-40B4-BE49-F238E27FC236}">
-                <a16:creationId xmlns:a16="http://schemas.microsoft.com/office/drawing/2014/main" id="{9B2C0102-229F-4564-B8A3-7C30A84482A9}"/>
+                <a16:creationId xmlns:a16="http://schemas.microsoft.com/office/drawing/2014/main" id="{1D4AE255-542E-4063-9127-45E090E509CE}"/>
               </a:ext>
             </a:extLst>
           </p:cNvPr>
@@ -5203,7 +5223,7 @@
           <p:cNvPr id="6" name="">
             <a:extLst xmlns:a="http://schemas.openxmlformats.org/drawingml/2006/main">
               <a:ext uri="{FF2B5EF4-FFF2-40B4-BE49-F238E27FC236}">
-                <a16:creationId xmlns:a16="http://schemas.microsoft.com/office/drawing/2014/main" id="{0786F1A5-351A-4D78-AD5E-D1832AB96D68}"/>
+                <a16:creationId xmlns:a16="http://schemas.microsoft.com/office/drawing/2014/main" id="{682C0E9C-7E9D-4D7E-807B-FDDF83086BEA}"/>
               </a:ext>
             </a:extLst>
           </p:cNvPr>
@@ -5235,7 +5255,7 @@
           <p:cNvPr id="7" name="python-cross-element">
             <a:extLst xmlns:a="http://schemas.openxmlformats.org/drawingml/2006/main">
               <a:ext uri="{FF2B5EF4-FFF2-40B4-BE49-F238E27FC236}">
-                <a16:creationId xmlns:a16="http://schemas.microsoft.com/office/drawing/2014/main" id="{81110248-C432-48BC-B4C9-7BAD6F6170D7}"/>
+                <a16:creationId xmlns:a16="http://schemas.microsoft.com/office/drawing/2014/main" id="{5D005D62-71D7-4ECB-B551-3DA2574286E9}"/>
               </a:ext>
             </a:extLst>
           </p:cNvPr>
@@ -5361,7 +5381,7 @@
           <p:cNvPr id="8" name="cross-element-result">
             <a:extLst xmlns:a="http://schemas.openxmlformats.org/drawingml/2006/main">
               <a:ext uri="{FF2B5EF4-FFF2-40B4-BE49-F238E27FC236}">
-                <a16:creationId xmlns:a16="http://schemas.microsoft.com/office/drawing/2014/main" id="{96861610-DB37-4592-A784-27083D211F0E}"/>
+                <a16:creationId xmlns:a16="http://schemas.microsoft.com/office/drawing/2014/main" id="{93F59416-4A9C-4E20-A30A-FE7F4BBA2051}"/>
               </a:ext>
             </a:extLst>
           </p:cNvPr>
@@ -5447,7 +5467,7 @@
           <p:cNvPr id="9" name="eyebrow">
             <a:extLst xmlns:a="http://schemas.openxmlformats.org/drawingml/2006/main">
               <a:ext uri="{FF2B5EF4-FFF2-40B4-BE49-F238E27FC236}">
-                <a16:creationId xmlns:a16="http://schemas.microsoft.com/office/drawing/2014/main" id="{1E95EC43-F5C6-47F0-AA6F-2637EB7D9009}"/>
+                <a16:creationId xmlns:a16="http://schemas.microsoft.com/office/drawing/2014/main" id="{EE74BF4F-C932-490C-B72F-9E641263A401}"/>
               </a:ext>
             </a:extLst>
           </p:cNvPr>
@@ -5504,7 +5524,7 @@
           <p:cNvPr id="2" name="slide-title">
             <a:extLst xmlns:a="http://schemas.openxmlformats.org/drawingml/2006/main">
               <a:ext uri="{FF2B5EF4-FFF2-40B4-BE49-F238E27FC236}">
-                <a16:creationId xmlns:a16="http://schemas.microsoft.com/office/drawing/2014/main" id="{55D7651E-34D2-4598-987D-93BF9A786D7F}"/>
+                <a16:creationId xmlns:a16="http://schemas.microsoft.com/office/drawing/2014/main" id="{3B4D764D-4293-4C72-BCC5-D71C20C7F4AC}"/>
               </a:ext>
             </a:extLst>
           </p:cNvPr>
@@ -5561,7 +5581,7 @@
           <p:cNvPr id="3" name="">
             <a:extLst xmlns:a="http://schemas.openxmlformats.org/drawingml/2006/main">
               <a:ext uri="{FF2B5EF4-FFF2-40B4-BE49-F238E27FC236}">
-                <a16:creationId xmlns:a16="http://schemas.microsoft.com/office/drawing/2014/main" id="{CDD91B12-2666-4B4C-ACAB-37FA2361700A}"/>
+                <a16:creationId xmlns:a16="http://schemas.microsoft.com/office/drawing/2014/main" id="{43E8F6C7-F08A-47CB-AC20-463A50072F63}"/>
               </a:ext>
             </a:extLst>
           </p:cNvPr>
@@ -5593,7 +5613,7 @@
           <p:cNvPr id="4" name="slide-number">
             <a:extLst xmlns:a="http://schemas.openxmlformats.org/drawingml/2006/main">
               <a:ext uri="{FF2B5EF4-FFF2-40B4-BE49-F238E27FC236}">
-                <a16:creationId xmlns:a16="http://schemas.microsoft.com/office/drawing/2014/main" id="{93C7D806-6806-437A-BDBA-06D4CA4EBD26}"/>
+                <a16:creationId xmlns:a16="http://schemas.microsoft.com/office/drawing/2014/main" id="{D864C01F-1614-4410-AC35-BB354473C3D1}"/>
               </a:ext>
             </a:extLst>
           </p:cNvPr>
@@ -5650,7 +5670,7 @@
           <p:cNvPr id="5" name="">
             <a:extLst xmlns:a="http://schemas.openxmlformats.org/drawingml/2006/main">
               <a:ext uri="{FF2B5EF4-FFF2-40B4-BE49-F238E27FC236}">
-                <a16:creationId xmlns:a16="http://schemas.microsoft.com/office/drawing/2014/main" id="{DE4060E2-D788-4961-9DE1-6BAEA9670C80}"/>
+                <a16:creationId xmlns:a16="http://schemas.microsoft.com/office/drawing/2014/main" id="{F25C33D0-35C6-4F68-A08A-E7D8E71ADB69}"/>
               </a:ext>
             </a:extLst>
           </p:cNvPr>
@@ -5682,7 +5702,7 @@
           <p:cNvPr id="6" name="python-elem-match">
             <a:extLst xmlns:a="http://schemas.openxmlformats.org/drawingml/2006/main">
               <a:ext uri="{FF2B5EF4-FFF2-40B4-BE49-F238E27FC236}">
-                <a16:creationId xmlns:a16="http://schemas.microsoft.com/office/drawing/2014/main" id="{678C81E9-BEC2-4579-9EFC-4C38E7724352}"/>
+                <a16:creationId xmlns:a16="http://schemas.microsoft.com/office/drawing/2014/main" id="{C602BD35-1096-46D6-B704-814CC4AA66B6}"/>
               </a:ext>
             </a:extLst>
           </p:cNvPr>
@@ -5854,7 +5874,7 @@
           <p:cNvPr id="7" name="elem-match-result">
             <a:extLst xmlns:a="http://schemas.openxmlformats.org/drawingml/2006/main">
               <a:ext uri="{FF2B5EF4-FFF2-40B4-BE49-F238E27FC236}">
-                <a16:creationId xmlns:a16="http://schemas.microsoft.com/office/drawing/2014/main" id="{3E3475D1-F152-4400-9AC6-DA30C9259A82}"/>
+                <a16:creationId xmlns:a16="http://schemas.microsoft.com/office/drawing/2014/main" id="{8F590F79-5FB2-40CB-9421-9E9A9269BB7A}"/>
               </a:ext>
             </a:extLst>
           </p:cNvPr>
@@ -5934,7 +5954,7 @@
           <p:cNvPr id="8" name="elem-match-transfer">
             <a:extLst xmlns:a="http://schemas.openxmlformats.org/drawingml/2006/main">
               <a:ext uri="{FF2B5EF4-FFF2-40B4-BE49-F238E27FC236}">
-                <a16:creationId xmlns:a16="http://schemas.microsoft.com/office/drawing/2014/main" id="{E9BE0B2C-16B8-4339-A6D1-2F96C8583BA3}"/>
+                <a16:creationId xmlns:a16="http://schemas.microsoft.com/office/drawing/2014/main" id="{B6FD4F07-52DD-4826-BDA0-AF0845737059}"/>
               </a:ext>
             </a:extLst>
           </p:cNvPr>
@@ -6043,7 +6063,7 @@
           <p:cNvPr id="9" name="eyebrow">
             <a:extLst xmlns:a="http://schemas.openxmlformats.org/drawingml/2006/main">
               <a:ext uri="{FF2B5EF4-FFF2-40B4-BE49-F238E27FC236}">
-                <a16:creationId xmlns:a16="http://schemas.microsoft.com/office/drawing/2014/main" id="{200FF74F-C904-47AA-A5F2-80459B54514D}"/>
+                <a16:creationId xmlns:a16="http://schemas.microsoft.com/office/drawing/2014/main" id="{7BC0B7AC-21E7-4C5F-9506-DF16C9A800C2}"/>
               </a:ext>
             </a:extLst>
           </p:cNvPr>
@@ -6100,7 +6120,7 @@
           <p:cNvPr id="2" name="slide-title">
             <a:extLst xmlns:a="http://schemas.openxmlformats.org/drawingml/2006/main">
               <a:ext uri="{FF2B5EF4-FFF2-40B4-BE49-F238E27FC236}">
-                <a16:creationId xmlns:a16="http://schemas.microsoft.com/office/drawing/2014/main" id="{C199F47D-6CBF-4694-A35A-42DF79708E6B}"/>
+                <a16:creationId xmlns:a16="http://schemas.microsoft.com/office/drawing/2014/main" id="{FA12C4A8-66EE-4585-8A19-0723424B84E9}"/>
               </a:ext>
             </a:extLst>
           </p:cNvPr>
@@ -6157,7 +6177,7 @@
           <p:cNvPr id="3" name="">
             <a:extLst xmlns:a="http://schemas.openxmlformats.org/drawingml/2006/main">
               <a:ext uri="{FF2B5EF4-FFF2-40B4-BE49-F238E27FC236}">
-                <a16:creationId xmlns:a16="http://schemas.microsoft.com/office/drawing/2014/main" id="{F2061943-8AE3-436A-A724-E8FED2CF9C85}"/>
+                <a16:creationId xmlns:a16="http://schemas.microsoft.com/office/drawing/2014/main" id="{A7259DBC-F938-41DB-A752-DAFA4EAFCD6E}"/>
               </a:ext>
             </a:extLst>
           </p:cNvPr>
@@ -6189,7 +6209,7 @@
           <p:cNvPr id="4" name="slide-number">
             <a:extLst xmlns:a="http://schemas.openxmlformats.org/drawingml/2006/main">
               <a:ext uri="{FF2B5EF4-FFF2-40B4-BE49-F238E27FC236}">
-                <a16:creationId xmlns:a16="http://schemas.microsoft.com/office/drawing/2014/main" id="{9B5360B6-5864-4B4B-9CF6-83276BED8237}"/>
+                <a16:creationId xmlns:a16="http://schemas.microsoft.com/office/drawing/2014/main" id="{C5C75BE3-3831-4D64-B755-19FABADE0B15}"/>
               </a:ext>
             </a:extLst>
           </p:cNvPr>
@@ -6246,7 +6266,7 @@
           <p:cNvPr id="5" name="">
             <a:extLst xmlns:a="http://schemas.openxmlformats.org/drawingml/2006/main">
               <a:ext uri="{FF2B5EF4-FFF2-40B4-BE49-F238E27FC236}">
-                <a16:creationId xmlns:a16="http://schemas.microsoft.com/office/drawing/2014/main" id="{C2292602-A46C-4B2C-B58B-BE6837D2E299}"/>
+                <a16:creationId xmlns:a16="http://schemas.microsoft.com/office/drawing/2014/main" id="{80529D5A-9724-41B7-8C04-D1DA57129BEA}"/>
               </a:ext>
             </a:extLst>
           </p:cNvPr>
@@ -6278,7 +6298,7 @@
           <p:cNvPr id="6" name="python-test-insert">
             <a:extLst xmlns:a="http://schemas.openxmlformats.org/drawingml/2006/main">
               <a:ext uri="{FF2B5EF4-FFF2-40B4-BE49-F238E27FC236}">
-                <a16:creationId xmlns:a16="http://schemas.microsoft.com/office/drawing/2014/main" id="{A301E17A-EA68-4D81-A85A-0DFFF8F39CAE}"/>
+                <a16:creationId xmlns:a16="http://schemas.microsoft.com/office/drawing/2014/main" id="{D887411B-CD04-4CD6-BF01-1603BC040D9A}"/>
               </a:ext>
             </a:extLst>
           </p:cNvPr>
@@ -6496,7 +6516,7 @@
           <p:cNvPr id="7" name="test-scope">
             <a:extLst xmlns:a="http://schemas.openxmlformats.org/drawingml/2006/main">
               <a:ext uri="{FF2B5EF4-FFF2-40B4-BE49-F238E27FC236}">
-                <a16:creationId xmlns:a16="http://schemas.microsoft.com/office/drawing/2014/main" id="{71B14C5B-8C1F-4471-98D4-0BB8EF1E2857}"/>
+                <a16:creationId xmlns:a16="http://schemas.microsoft.com/office/drawing/2014/main" id="{59DA1881-CF65-4EDE-9C6F-BEE181060ECD}"/>
               </a:ext>
             </a:extLst>
           </p:cNvPr>
@@ -6576,7 +6596,7 @@
           <p:cNvPr id="8" name="test-readiness">
             <a:extLst xmlns:a="http://schemas.openxmlformats.org/drawingml/2006/main">
               <a:ext uri="{FF2B5EF4-FFF2-40B4-BE49-F238E27FC236}">
-                <a16:creationId xmlns:a16="http://schemas.microsoft.com/office/drawing/2014/main" id="{DA4E0DA9-D4D8-4496-B680-428F5A838056}"/>
+                <a16:creationId xmlns:a16="http://schemas.microsoft.com/office/drawing/2014/main" id="{3B6C2146-591E-4545-BE1F-64D7E6619E3D}"/>
               </a:ext>
             </a:extLst>
           </p:cNvPr>
@@ -6662,7 +6682,7 @@
           <p:cNvPr id="8" name="eyebrow">
             <a:extLst xmlns:a="http://schemas.openxmlformats.org/drawingml/2006/main">
               <a:ext uri="{FF2B5EF4-FFF2-40B4-BE49-F238E27FC236}">
-                <a16:creationId xmlns:a16="http://schemas.microsoft.com/office/drawing/2014/main" id="{F718A9C6-FF1F-4CFC-856C-E79EE44B584E}"/>
+                <a16:creationId xmlns:a16="http://schemas.microsoft.com/office/drawing/2014/main" id="{54787561-E586-4DE4-A068-0CBBFB8FCD79}"/>
               </a:ext>
             </a:extLst>
           </p:cNvPr>
@@ -6719,7 +6739,7 @@
           <p:cNvPr id="2" name="slide-title">
             <a:extLst xmlns:a="http://schemas.openxmlformats.org/drawingml/2006/main">
               <a:ext uri="{FF2B5EF4-FFF2-40B4-BE49-F238E27FC236}">
-                <a16:creationId xmlns:a16="http://schemas.microsoft.com/office/drawing/2014/main" id="{93AF1BEA-DB13-40C3-8A54-5211C586949B}"/>
+                <a16:creationId xmlns:a16="http://schemas.microsoft.com/office/drawing/2014/main" id="{960CEBCE-61B8-4EF3-BE2D-021558EBF079}"/>
               </a:ext>
             </a:extLst>
           </p:cNvPr>
@@ -6776,7 +6796,7 @@
           <p:cNvPr id="3" name="">
             <a:extLst xmlns:a="http://schemas.openxmlformats.org/drawingml/2006/main">
               <a:ext uri="{FF2B5EF4-FFF2-40B4-BE49-F238E27FC236}">
-                <a16:creationId xmlns:a16="http://schemas.microsoft.com/office/drawing/2014/main" id="{59EE19E1-1702-4BE7-AE19-B776CF1DA048}"/>
+                <a16:creationId xmlns:a16="http://schemas.microsoft.com/office/drawing/2014/main" id="{12772C59-449D-4D71-81BE-35084EF4FFE9}"/>
               </a:ext>
             </a:extLst>
           </p:cNvPr>
@@ -6808,7 +6828,7 @@
           <p:cNvPr id="4" name="slide-number">
             <a:extLst xmlns:a="http://schemas.openxmlformats.org/drawingml/2006/main">
               <a:ext uri="{FF2B5EF4-FFF2-40B4-BE49-F238E27FC236}">
-                <a16:creationId xmlns:a16="http://schemas.microsoft.com/office/drawing/2014/main" id="{C00CAB22-98EB-447B-9004-40C19F9AFDDF}"/>
+                <a16:creationId xmlns:a16="http://schemas.microsoft.com/office/drawing/2014/main" id="{A18A73AC-7825-458D-8091-8D4647D19CDB}"/>
               </a:ext>
             </a:extLst>
           </p:cNvPr>
@@ -6865,7 +6885,7 @@
           <p:cNvPr id="5" name="">
             <a:extLst xmlns:a="http://schemas.openxmlformats.org/drawingml/2006/main">
               <a:ext uri="{FF2B5EF4-FFF2-40B4-BE49-F238E27FC236}">
-                <a16:creationId xmlns:a16="http://schemas.microsoft.com/office/drawing/2014/main" id="{E674BA52-F96B-4181-939F-E443A94C9FCC}"/>
+                <a16:creationId xmlns:a16="http://schemas.microsoft.com/office/drawing/2014/main" id="{54CFEB3F-DDAE-466D-89FC-82AC469F91D4}"/>
               </a:ext>
             </a:extLst>
           </p:cNvPr>
@@ -6897,7 +6917,7 @@
           <p:cNvPr id="6" name="python-set">
             <a:extLst xmlns:a="http://schemas.openxmlformats.org/drawingml/2006/main">
               <a:ext uri="{FF2B5EF4-FFF2-40B4-BE49-F238E27FC236}">
-                <a16:creationId xmlns:a16="http://schemas.microsoft.com/office/drawing/2014/main" id="{34E2A0A3-AD2A-4B45-BE90-1F84F21E54AC}"/>
+                <a16:creationId xmlns:a16="http://schemas.microsoft.com/office/drawing/2014/main" id="{5422CC74-FCB3-4C93-ADF8-D5D962E387CE}"/>
               </a:ext>
             </a:extLst>
           </p:cNvPr>
@@ -7416,7 +7436,7 @@
           <p:cNvPr id="9" name="eyebrow">
             <a:extLst xmlns:a="http://schemas.openxmlformats.org/drawingml/2006/main">
               <a:ext uri="{FF2B5EF4-FFF2-40B4-BE49-F238E27FC236}">
-                <a16:creationId xmlns:a16="http://schemas.microsoft.com/office/drawing/2014/main" id="{B9643BD9-AC4F-4DF1-98F0-8868B9E40173}"/>
+                <a16:creationId xmlns:a16="http://schemas.microsoft.com/office/drawing/2014/main" id="{55526C65-7338-40B6-9F2F-02B2BBF2D814}"/>
               </a:ext>
             </a:extLst>
           </p:cNvPr>
@@ -7473,7 +7493,7 @@
           <p:cNvPr id="2" name="slide-title">
             <a:extLst xmlns:a="http://schemas.openxmlformats.org/drawingml/2006/main">
               <a:ext uri="{FF2B5EF4-FFF2-40B4-BE49-F238E27FC236}">
-                <a16:creationId xmlns:a16="http://schemas.microsoft.com/office/drawing/2014/main" id="{55FE01FF-4BC1-4FF1-B951-43AA9E2CAFAA}"/>
+                <a16:creationId xmlns:a16="http://schemas.microsoft.com/office/drawing/2014/main" id="{17653285-D5D0-412A-A058-A052FF082FBB}"/>
               </a:ext>
             </a:extLst>
           </p:cNvPr>
@@ -7530,7 +7550,7 @@
           <p:cNvPr id="3" name="">
             <a:extLst xmlns:a="http://schemas.openxmlformats.org/drawingml/2006/main">
               <a:ext uri="{FF2B5EF4-FFF2-40B4-BE49-F238E27FC236}">
-                <a16:creationId xmlns:a16="http://schemas.microsoft.com/office/drawing/2014/main" id="{E82F44F0-9186-424E-A208-62DE4E4A30CF}"/>
+                <a16:creationId xmlns:a16="http://schemas.microsoft.com/office/drawing/2014/main" id="{C93366B2-1C6E-47EF-AA59-14F3B9780BE4}"/>
               </a:ext>
             </a:extLst>
           </p:cNvPr>
@@ -7562,7 +7582,7 @@
           <p:cNvPr id="4" name="slide-number">
             <a:extLst xmlns:a="http://schemas.openxmlformats.org/drawingml/2006/main">
               <a:ext uri="{FF2B5EF4-FFF2-40B4-BE49-F238E27FC236}">
-                <a16:creationId xmlns:a16="http://schemas.microsoft.com/office/drawing/2014/main" id="{E52767CD-E218-4C0B-987D-82AE2B61CEDF}"/>
+                <a16:creationId xmlns:a16="http://schemas.microsoft.com/office/drawing/2014/main" id="{8468EE43-1B86-4F64-8D7F-505DD6ED55FF}"/>
               </a:ext>
             </a:extLst>
           </p:cNvPr>
@@ -7619,7 +7639,7 @@
           <p:cNvPr id="5" name="">
             <a:extLst xmlns:a="http://schemas.openxmlformats.org/drawingml/2006/main">
               <a:ext uri="{FF2B5EF4-FFF2-40B4-BE49-F238E27FC236}">
-                <a16:creationId xmlns:a16="http://schemas.microsoft.com/office/drawing/2014/main" id="{E150508C-AE39-4E0D-B9B4-F271AA01E21B}"/>
+                <a16:creationId xmlns:a16="http://schemas.microsoft.com/office/drawing/2014/main" id="{36FD4B3B-9096-4C67-B0E0-BFBA6C3BB86B}"/>
               </a:ext>
             </a:extLst>
           </p:cNvPr>
@@ -7651,7 +7671,7 @@
           <p:cNvPr id="6" name="python-stale">
             <a:extLst xmlns:a="http://schemas.openxmlformats.org/drawingml/2006/main">
               <a:ext uri="{FF2B5EF4-FFF2-40B4-BE49-F238E27FC236}">
-                <a16:creationId xmlns:a16="http://schemas.microsoft.com/office/drawing/2014/main" id="{2FFF29F9-8DA3-49E6-9229-C7F8EED4AA40}"/>
+                <a16:creationId xmlns:a16="http://schemas.microsoft.com/office/drawing/2014/main" id="{A92B583B-653A-4915-89AE-1A1287D27E90}"/>
               </a:ext>
             </a:extLst>
           </p:cNvPr>
@@ -7823,7 +7843,7 @@
           <p:cNvPr id="7" name="stale-result">
             <a:extLst xmlns:a="http://schemas.openxmlformats.org/drawingml/2006/main">
               <a:ext uri="{FF2B5EF4-FFF2-40B4-BE49-F238E27FC236}">
-                <a16:creationId xmlns:a16="http://schemas.microsoft.com/office/drawing/2014/main" id="{BCBD4DD3-2872-4B45-A4BA-40FD7A6CFF6B}"/>
+                <a16:creationId xmlns:a16="http://schemas.microsoft.com/office/drawing/2014/main" id="{012D3D41-E636-4DE6-B72E-482144E6A084}"/>
               </a:ext>
             </a:extLst>
           </p:cNvPr>
@@ -7903,7 +7923,7 @@
           <p:cNvPr id="8" name="stale-meaning">
             <a:extLst xmlns:a="http://schemas.openxmlformats.org/drawingml/2006/main">
               <a:ext uri="{FF2B5EF4-FFF2-40B4-BE49-F238E27FC236}">
-                <a16:creationId xmlns:a16="http://schemas.microsoft.com/office/drawing/2014/main" id="{89C0E784-1E85-49E9-871E-0540BAC568D0}"/>
+                <a16:creationId xmlns:a16="http://schemas.microsoft.com/office/drawing/2014/main" id="{3895C149-84B3-4CDB-AF9A-3F910F0BD377}"/>
               </a:ext>
             </a:extLst>
           </p:cNvPr>
@@ -7989,7 +8009,7 @@
           <p:cNvPr id="9" name="eyebrow">
             <a:extLst xmlns:a="http://schemas.openxmlformats.org/drawingml/2006/main">
               <a:ext uri="{FF2B5EF4-FFF2-40B4-BE49-F238E27FC236}">
-                <a16:creationId xmlns:a16="http://schemas.microsoft.com/office/drawing/2014/main" id="{3CF5200F-B589-4E7A-84D5-91C06CAFED84}"/>
+                <a16:creationId xmlns:a16="http://schemas.microsoft.com/office/drawing/2014/main" id="{C8F91691-1E7A-4206-A783-4A7F20DA5D6B}"/>
               </a:ext>
             </a:extLst>
           </p:cNvPr>
@@ -8046,7 +8066,7 @@
           <p:cNvPr id="2" name="slide-title">
             <a:extLst xmlns:a="http://schemas.openxmlformats.org/drawingml/2006/main">
               <a:ext uri="{FF2B5EF4-FFF2-40B4-BE49-F238E27FC236}">
-                <a16:creationId xmlns:a16="http://schemas.microsoft.com/office/drawing/2014/main" id="{D373AF83-5BF1-4099-A6E1-3CDA31820452}"/>
+                <a16:creationId xmlns:a16="http://schemas.microsoft.com/office/drawing/2014/main" id="{E52357E5-5976-4293-959E-C07E749B5AD1}"/>
               </a:ext>
             </a:extLst>
           </p:cNvPr>
@@ -8103,7 +8123,7 @@
           <p:cNvPr id="3" name="">
             <a:extLst xmlns:a="http://schemas.openxmlformats.org/drawingml/2006/main">
               <a:ext uri="{FF2B5EF4-FFF2-40B4-BE49-F238E27FC236}">
-                <a16:creationId xmlns:a16="http://schemas.microsoft.com/office/drawing/2014/main" id="{22002A6A-23EA-4C2B-93EE-549FFBED7902}"/>
+                <a16:creationId xmlns:a16="http://schemas.microsoft.com/office/drawing/2014/main" id="{2290F278-8FAE-4978-A3BF-6316F14B5B0F}"/>
               </a:ext>
             </a:extLst>
           </p:cNvPr>
@@ -8135,7 +8155,7 @@
           <p:cNvPr id="4" name="slide-number">
             <a:extLst xmlns:a="http://schemas.openxmlformats.org/drawingml/2006/main">
               <a:ext uri="{FF2B5EF4-FFF2-40B4-BE49-F238E27FC236}">
-                <a16:creationId xmlns:a16="http://schemas.microsoft.com/office/drawing/2014/main" id="{21F4796E-3FE0-4F09-ADF6-4D4AB2F2B9E4}"/>
+                <a16:creationId xmlns:a16="http://schemas.microsoft.com/office/drawing/2014/main" id="{8F0565FC-D1CB-4105-81AB-554BBAA8B595}"/>
               </a:ext>
             </a:extLst>
           </p:cNvPr>
@@ -8192,7 +8212,7 @@
           <p:cNvPr id="5" name="">
             <a:extLst xmlns:a="http://schemas.openxmlformats.org/drawingml/2006/main">
               <a:ext uri="{FF2B5EF4-FFF2-40B4-BE49-F238E27FC236}">
-                <a16:creationId xmlns:a16="http://schemas.microsoft.com/office/drawing/2014/main" id="{43DDB959-A302-4ECD-A33D-84E779A4AED5}"/>
+                <a16:creationId xmlns:a16="http://schemas.microsoft.com/office/drawing/2014/main" id="{257FB5B1-2C9C-4E16-B8EB-FEF1A4FA78C4}"/>
               </a:ext>
             </a:extLst>
           </p:cNvPr>
@@ -8224,7 +8244,7 @@
           <p:cNvPr id="6" name="python-push">
             <a:extLst xmlns:a="http://schemas.openxmlformats.org/drawingml/2006/main">
               <a:ext uri="{FF2B5EF4-FFF2-40B4-BE49-F238E27FC236}">
-                <a16:creationId xmlns:a16="http://schemas.microsoft.com/office/drawing/2014/main" id="{D6FA1A81-7405-4A8B-8A38-7120C790F336}"/>
+                <a16:creationId xmlns:a16="http://schemas.microsoft.com/office/drawing/2014/main" id="{86213E85-C5CD-456B-9C72-FA9A39FBF476}"/>
               </a:ext>
             </a:extLst>
           </p:cNvPr>
@@ -8442,7 +8462,7 @@
           <p:cNvPr id="7" name="push-result">
             <a:extLst xmlns:a="http://schemas.openxmlformats.org/drawingml/2006/main">
               <a:ext uri="{FF2B5EF4-FFF2-40B4-BE49-F238E27FC236}">
-                <a16:creationId xmlns:a16="http://schemas.microsoft.com/office/drawing/2014/main" id="{6F953D98-930D-474F-A573-19FDF43E9269}"/>
+                <a16:creationId xmlns:a16="http://schemas.microsoft.com/office/drawing/2014/main" id="{AEF5FF65-2758-4712-81D0-EF2D8A057FC7}"/>
               </a:ext>
             </a:extLst>
           </p:cNvPr>
@@ -8522,7 +8542,7 @@
           <p:cNvPr id="8" name="separate-writes">
             <a:extLst xmlns:a="http://schemas.openxmlformats.org/drawingml/2006/main">
               <a:ext uri="{FF2B5EF4-FFF2-40B4-BE49-F238E27FC236}">
-                <a16:creationId xmlns:a16="http://schemas.microsoft.com/office/drawing/2014/main" id="{D8F6B88A-DC75-4B55-997B-A518BC606686}"/>
+                <a16:creationId xmlns:a16="http://schemas.microsoft.com/office/drawing/2014/main" id="{FA1DF4D4-8E1E-406E-906C-A8A8FE7BB10E}"/>
               </a:ext>
             </a:extLst>
           </p:cNvPr>
@@ -8631,7 +8651,7 @@
           <p:cNvPr id="9" name="eyebrow">
             <a:extLst xmlns:a="http://schemas.openxmlformats.org/drawingml/2006/main">
               <a:ext uri="{FF2B5EF4-FFF2-40B4-BE49-F238E27FC236}">
-                <a16:creationId xmlns:a16="http://schemas.microsoft.com/office/drawing/2014/main" id="{729CB606-2739-42F4-AD86-8200A8E83745}"/>
+                <a16:creationId xmlns:a16="http://schemas.microsoft.com/office/drawing/2014/main" id="{59A9871A-5F9D-4580-88AE-AF38D8F4DDE8}"/>
               </a:ext>
             </a:extLst>
           </p:cNvPr>
@@ -8688,7 +8708,7 @@
           <p:cNvPr id="2" name="slide-title">
             <a:extLst xmlns:a="http://schemas.openxmlformats.org/drawingml/2006/main">
               <a:ext uri="{FF2B5EF4-FFF2-40B4-BE49-F238E27FC236}">
-                <a16:creationId xmlns:a16="http://schemas.microsoft.com/office/drawing/2014/main" id="{5E0D61C5-216D-40BD-9132-1D2B10BA7A72}"/>
+                <a16:creationId xmlns:a16="http://schemas.microsoft.com/office/drawing/2014/main" id="{7D50A5EC-3482-4E79-9486-6E8FD70CBA06}"/>
               </a:ext>
             </a:extLst>
           </p:cNvPr>
@@ -8745,7 +8765,7 @@
           <p:cNvPr id="3" name="">
             <a:extLst xmlns:a="http://schemas.openxmlformats.org/drawingml/2006/main">
               <a:ext uri="{FF2B5EF4-FFF2-40B4-BE49-F238E27FC236}">
-                <a16:creationId xmlns:a16="http://schemas.microsoft.com/office/drawing/2014/main" id="{6EE3C7D9-876D-4CEE-9232-F6BDFBF11648}"/>
+                <a16:creationId xmlns:a16="http://schemas.microsoft.com/office/drawing/2014/main" id="{386FD60B-753F-4C9D-AACF-379FDCBB3BF5}"/>
               </a:ext>
             </a:extLst>
           </p:cNvPr>
@@ -8777,7 +8797,7 @@
           <p:cNvPr id="4" name="slide-number">
             <a:extLst xmlns:a="http://schemas.openxmlformats.org/drawingml/2006/main">
               <a:ext uri="{FF2B5EF4-FFF2-40B4-BE49-F238E27FC236}">
-                <a16:creationId xmlns:a16="http://schemas.microsoft.com/office/drawing/2014/main" id="{6A8CA366-76BE-43A8-9C02-DB90F164C911}"/>
+                <a16:creationId xmlns:a16="http://schemas.microsoft.com/office/drawing/2014/main" id="{86E7BEAE-20DA-4FC8-83D3-17F03945EB20}"/>
               </a:ext>
             </a:extLst>
           </p:cNvPr>
@@ -8834,7 +8854,7 @@
           <p:cNvPr id="5" name="">
             <a:extLst xmlns:a="http://schemas.openxmlformats.org/drawingml/2006/main">
               <a:ext uri="{FF2B5EF4-FFF2-40B4-BE49-F238E27FC236}">
-                <a16:creationId xmlns:a16="http://schemas.microsoft.com/office/drawing/2014/main" id="{2368D86A-77D7-4876-93A1-8B030C335CB8}"/>
+                <a16:creationId xmlns:a16="http://schemas.microsoft.com/office/drawing/2014/main" id="{BA772001-AEED-420F-911D-A083FD47D223}"/>
               </a:ext>
             </a:extLst>
           </p:cNvPr>
@@ -8866,7 +8886,7 @@
           <p:cNvPr id="6" name="python-delete">
             <a:extLst xmlns:a="http://schemas.openxmlformats.org/drawingml/2006/main">
               <a:ext uri="{FF2B5EF4-FFF2-40B4-BE49-F238E27FC236}">
-                <a16:creationId xmlns:a16="http://schemas.microsoft.com/office/drawing/2014/main" id="{ADB5D641-A44F-4FB7-A9D8-B70EFA9BE9DC}"/>
+                <a16:creationId xmlns:a16="http://schemas.microsoft.com/office/drawing/2014/main" id="{293C9A01-2E87-4CBC-A2AF-8C71CA51FBEA}"/>
               </a:ext>
             </a:extLst>
           </p:cNvPr>
@@ -9061,7 +9081,7 @@
           <p:cNvPr id="7" name="delete-result">
             <a:extLst xmlns:a="http://schemas.openxmlformats.org/drawingml/2006/main">
               <a:ext uri="{FF2B5EF4-FFF2-40B4-BE49-F238E27FC236}">
-                <a16:creationId xmlns:a16="http://schemas.microsoft.com/office/drawing/2014/main" id="{9A8675E8-9422-41D1-A6DA-8B7103D60F2E}"/>
+                <a16:creationId xmlns:a16="http://schemas.microsoft.com/office/drawing/2014/main" id="{701BA9A8-1F43-4763-9A55-4B0540E364D1}"/>
               </a:ext>
             </a:extLst>
           </p:cNvPr>
@@ -9141,7 +9161,7 @@
           <p:cNvPr id="8" name="delete-caution">
             <a:extLst xmlns:a="http://schemas.openxmlformats.org/drawingml/2006/main">
               <a:ext uri="{FF2B5EF4-FFF2-40B4-BE49-F238E27FC236}">
-                <a16:creationId xmlns:a16="http://schemas.microsoft.com/office/drawing/2014/main" id="{4BF01DF3-542F-4CE6-B139-8207043D911A}"/>
+                <a16:creationId xmlns:a16="http://schemas.microsoft.com/office/drawing/2014/main" id="{032E5727-7AF6-44F6-9600-52D93749872D}"/>
               </a:ext>
             </a:extLst>
           </p:cNvPr>
@@ -9250,7 +9270,7 @@
           <p:cNvPr id="7" name="eyebrow">
             <a:extLst xmlns:a="http://schemas.openxmlformats.org/drawingml/2006/main">
               <a:ext uri="{FF2B5EF4-FFF2-40B4-BE49-F238E27FC236}">
-                <a16:creationId xmlns:a16="http://schemas.microsoft.com/office/drawing/2014/main" id="{195BFF95-3D82-45E5-BC3F-71EF4AA4BB68}"/>
+                <a16:creationId xmlns:a16="http://schemas.microsoft.com/office/drawing/2014/main" id="{7A1C0E2F-D1DB-4D26-8E13-726FA5799C09}"/>
               </a:ext>
             </a:extLst>
           </p:cNvPr>
@@ -9307,7 +9327,7 @@
           <p:cNvPr id="2" name="slide-title">
             <a:extLst xmlns:a="http://schemas.openxmlformats.org/drawingml/2006/main">
               <a:ext uri="{FF2B5EF4-FFF2-40B4-BE49-F238E27FC236}">
-                <a16:creationId xmlns:a16="http://schemas.microsoft.com/office/drawing/2014/main" id="{AD155FAC-FDFB-4E83-853E-C39C0153C50E}"/>
+                <a16:creationId xmlns:a16="http://schemas.microsoft.com/office/drawing/2014/main" id="{72879A1F-B8C7-4E4C-AE17-AC1E7D9F1A3A}"/>
               </a:ext>
             </a:extLst>
           </p:cNvPr>
@@ -9354,7 +9374,7 @@
                 <a:ea typeface="Helvetica Neue"/>
                 <a:cs typeface="Helvetica Neue"/>
               </a:rPr>
-              <a:t>Lab 1: a query change and a write experiment</a:t>
+              <a:t>Lab 1: the lighting and sanitation queue</a:t>
             </a:r>
           </a:p>
         </p:txBody>
@@ -9364,7 +9384,7 @@
           <p:cNvPr id="3" name="">
             <a:extLst xmlns:a="http://schemas.openxmlformats.org/drawingml/2006/main">
               <a:ext uri="{FF2B5EF4-FFF2-40B4-BE49-F238E27FC236}">
-                <a16:creationId xmlns:a16="http://schemas.microsoft.com/office/drawing/2014/main" id="{3CA9EB7B-84D4-43C8-AE05-0D313D78B244}"/>
+                <a16:creationId xmlns:a16="http://schemas.microsoft.com/office/drawing/2014/main" id="{FDAF2C19-4A26-40C4-8036-122B411352FD}"/>
               </a:ext>
             </a:extLst>
           </p:cNvPr>
@@ -9396,7 +9416,7 @@
           <p:cNvPr id="4" name="slide-number">
             <a:extLst xmlns:a="http://schemas.openxmlformats.org/drawingml/2006/main">
               <a:ext uri="{FF2B5EF4-FFF2-40B4-BE49-F238E27FC236}">
-                <a16:creationId xmlns:a16="http://schemas.microsoft.com/office/drawing/2014/main" id="{A560F554-10DB-4F0F-82FE-1736C21E8FB2}"/>
+                <a16:creationId xmlns:a16="http://schemas.microsoft.com/office/drawing/2014/main" id="{F62EC93F-6FA3-4345-B07A-F1C3F477ACCA}"/>
               </a:ext>
             </a:extLst>
           </p:cNvPr>
@@ -9453,7 +9473,7 @@
           <p:cNvPr id="5" name="lab1-work">
             <a:extLst xmlns:a="http://schemas.openxmlformats.org/drawingml/2006/main">
               <a:ext uri="{FF2B5EF4-FFF2-40B4-BE49-F238E27FC236}">
-                <a16:creationId xmlns:a16="http://schemas.microsoft.com/office/drawing/2014/main" id="{9374B769-8E93-4882-A2D5-9AB92A67A7DE}"/>
+                <a16:creationId xmlns:a16="http://schemas.microsoft.com/office/drawing/2014/main" id="{AF9D49C4-82B6-4D19-8C1D-8767552365E3}"/>
               </a:ext>
             </a:extLst>
           </p:cNvPr>
@@ -9465,7 +9485,7 @@
         <p:spPr>
           <a:xfrm xmlns:a="http://schemas.openxmlformats.org/drawingml/2006/main">
             <a:off x="723900" y="1828800"/>
-            <a:ext cx="10668000" cy="2819400"/>
+            <a:ext cx="10668000" cy="3057525"/>
           </a:xfrm>
           <a:prstGeom xmlns:a="http://schemas.openxmlformats.org/drawingml/2006/main" prst="rect">
             <a:avLst/>
@@ -9482,7 +9502,7 @@
           <a:lstStyle xmlns:a="http://schemas.openxmlformats.org/drawingml/2006/main"/>
           <a:p xmlns:a="http://schemas.openxmlformats.org/drawingml/2006/main">
             <a:pPr>
-              <a:defRPr sz="2400" b="0">
+              <a:defRPr sz="2325" b="0">
                 <a:solidFill>
                   <a:srgbClr val="111827"/>
                 </a:solidFill>
@@ -9492,7 +9512,7 @@
               </a:defRPr>
             </a:pPr>
             <a:r>
-              <a:rPr sz="2400" b="0">
+              <a:rPr sz="2325" b="0">
                 <a:solidFill>
                   <a:srgbClr val="111827"/>
                 </a:solidFill>
@@ -9500,12 +9520,12 @@
                 <a:ea typeface="Helvetica Neue"/>
                 <a:cs typeface="Helvetica Neue"/>
               </a:rPr>
-              <a:t>Change one filter and add one useful projected field.</a:t>
-            </a:r>
-          </a:p>
-          <a:p xmlns:a="http://schemas.openxmlformats.org/drawingml/2006/main">
-            <a:pPr>
-              <a:defRPr sz="2400" b="0">
+              <a:t>Show active streetlight or sanitation tickets, newest first.</a:t>
+            </a:r>
+          </a:p>
+          <a:p xmlns:a="http://schemas.openxmlformats.org/drawingml/2006/main">
+            <a:pPr>
+              <a:defRPr sz="2325" b="0">
                 <a:solidFill>
                   <a:srgbClr val="111827"/>
                 </a:solidFill>
@@ -9515,7 +9535,7 @@
               </a:defRPr>
             </a:pPr>
             <a:r>
-              <a:rPr sz="2400" b="0">
+              <a:rPr sz="2325" b="0">
                 <a:solidFill>
                   <a:srgbClr val="111827"/>
                 </a:solidFill>
@@ -9523,7 +9543,30 @@
                 <a:ea typeface="Helvetica Neue"/>
                 <a:cs typeface="Helvetica Neue"/>
               </a:rPr>
-              <a:t>Explain one returned ticket using the data.</a:t>
+              <a:t>Include priority so the crews can plan their work.</a:t>
+            </a:r>
+          </a:p>
+          <a:p xmlns:a="http://schemas.openxmlformats.org/drawingml/2006/main">
+            <a:pPr>
+              <a:defRPr sz="2325" b="0">
+                <a:solidFill>
+                  <a:srgbClr val="111827"/>
+                </a:solidFill>
+                <a:latin typeface="Helvetica Neue"/>
+                <a:ea typeface="Helvetica Neue"/>
+                <a:cs typeface="Helvetica Neue"/>
+              </a:defRPr>
+            </a:pPr>
+            <a:r>
+              <a:rPr sz="2325" b="0">
+                <a:solidFill>
+                  <a:srgbClr val="111827"/>
+                </a:solidFill>
+                <a:latin typeface="Helvetica Neue"/>
+                <a:ea typeface="Helvetica Neue"/>
+                <a:cs typeface="Helvetica Neue"/>
+              </a:rPr>
+              <a:t>Explain why high-priority ticket 1005 stays out of this queue.</a:t>
             </a:r>
           </a:p>
           <a:p xmlns:a="http://schemas.openxmlformats.org/drawingml/2006/main">
@@ -9533,7 +9576,7 @@
           </a:p>
           <a:p xmlns:a="http://schemas.openxmlformats.org/drawingml/2006/main">
             <a:pPr>
-              <a:defRPr sz="2400" b="0">
+              <a:defRPr sz="2325" b="0">
                 <a:solidFill>
                   <a:srgbClr val="111827"/>
                 </a:solidFill>
@@ -9543,7 +9586,7 @@
               </a:defRPr>
             </a:pPr>
             <a:r>
-              <a:rPr sz="2400" b="0">
+              <a:rPr sz="2325" b="0">
                 <a:solidFill>
                   <a:srgbClr val="111827"/>
                 </a:solidFill>
@@ -9551,12 +9594,12 @@
                 <a:ea typeface="Helvetica Neue"/>
                 <a:cs typeface="Helvetica Neue"/>
               </a:rPr>
-              <a:t>Compare the array queries. Run the $set cell twice, then</a:t>
-            </a:r>
-          </a:p>
-          <a:p xmlns:a="http://schemas.openxmlformats.org/drawingml/2006/main">
-            <a:pPr>
-              <a:defRPr sz="2400" b="0">
+              <a:t>Then compare the array queries and repeat the $set update.</a:t>
+            </a:r>
+          </a:p>
+          <a:p xmlns:a="http://schemas.openxmlformats.org/drawingml/2006/main">
+            <a:pPr>
+              <a:defRPr sz="2325" b="0">
                 <a:solidFill>
                   <a:srgbClr val="111827"/>
                 </a:solidFill>
@@ -9566,7 +9609,7 @@
               </a:defRPr>
             </a:pPr>
             <a:r>
-              <a:rPr sz="2400" b="0">
+              <a:rPr sz="2325" b="0">
                 <a:solidFill>
                   <a:srgbClr val="111827"/>
                 </a:solidFill>
@@ -9574,7 +9617,7 @@
                 <a:ea typeface="Helvetica Neue"/>
                 <a:cs typeface="Helvetica Neue"/>
               </a:rPr>
-              <a:t>compare the expected-state write and the targeted deletion.</a:t>
+              <a:t>Read the changed test ticket before deleting it.</a:t>
             </a:r>
           </a:p>
         </p:txBody>
@@ -9584,7 +9627,7 @@
           <p:cNvPr id="6" name="lab1-submit">
             <a:extLst xmlns:a="http://schemas.openxmlformats.org/drawingml/2006/main">
               <a:ext uri="{FF2B5EF4-FFF2-40B4-BE49-F238E27FC236}">
-                <a16:creationId xmlns:a16="http://schemas.microsoft.com/office/drawing/2014/main" id="{54FED306-D21A-4A09-B177-6AC3C8DB4B81}"/>
+                <a16:creationId xmlns:a16="http://schemas.microsoft.com/office/drawing/2014/main" id="{3BC43C9E-B98A-4905-9B98-15565F84CF16}"/>
               </a:ext>
             </a:extLst>
           </p:cNvPr>
@@ -9693,7 +9736,7 @@
           <p:cNvPr id="7" name="eyebrow">
             <a:extLst xmlns:a="http://schemas.openxmlformats.org/drawingml/2006/main">
               <a:ext uri="{FF2B5EF4-FFF2-40B4-BE49-F238E27FC236}">
-                <a16:creationId xmlns:a16="http://schemas.microsoft.com/office/drawing/2014/main" id="{E98CB28F-C07E-4677-8A91-5977059349C7}"/>
+                <a16:creationId xmlns:a16="http://schemas.microsoft.com/office/drawing/2014/main" id="{786CCADD-C69D-49E1-80D4-56F27CD76C65}"/>
               </a:ext>
             </a:extLst>
           </p:cNvPr>
@@ -9750,7 +9793,7 @@
           <p:cNvPr id="2" name="slide-title">
             <a:extLst xmlns:a="http://schemas.openxmlformats.org/drawingml/2006/main">
               <a:ext uri="{FF2B5EF4-FFF2-40B4-BE49-F238E27FC236}">
-                <a16:creationId xmlns:a16="http://schemas.microsoft.com/office/drawing/2014/main" id="{F817E4A0-9D6C-48E5-A157-0C0F8ED0D0AD}"/>
+                <a16:creationId xmlns:a16="http://schemas.microsoft.com/office/drawing/2014/main" id="{449218D1-A669-4D9F-A8A6-99FABFBAC654}"/>
               </a:ext>
             </a:extLst>
           </p:cNvPr>
@@ -9807,7 +9850,7 @@
           <p:cNvPr id="3" name="">
             <a:extLst xmlns:a="http://schemas.openxmlformats.org/drawingml/2006/main">
               <a:ext uri="{FF2B5EF4-FFF2-40B4-BE49-F238E27FC236}">
-                <a16:creationId xmlns:a16="http://schemas.microsoft.com/office/drawing/2014/main" id="{96F719DC-30A5-4E6B-A8C2-7E844C78DB12}"/>
+                <a16:creationId xmlns:a16="http://schemas.microsoft.com/office/drawing/2014/main" id="{23D75571-C409-4D9B-A466-55CFE6757FAC}"/>
               </a:ext>
             </a:extLst>
           </p:cNvPr>
@@ -9839,7 +9882,7 @@
           <p:cNvPr id="4" name="slide-number">
             <a:extLst xmlns:a="http://schemas.openxmlformats.org/drawingml/2006/main">
               <a:ext uri="{FF2B5EF4-FFF2-40B4-BE49-F238E27FC236}">
-                <a16:creationId xmlns:a16="http://schemas.microsoft.com/office/drawing/2014/main" id="{9DD6F726-06C6-4F16-9625-703577507E24}"/>
+                <a16:creationId xmlns:a16="http://schemas.microsoft.com/office/drawing/2014/main" id="{5AB8C24E-2ADA-4DBD-A56C-2E72B52AA9B3}"/>
               </a:ext>
             </a:extLst>
           </p:cNvPr>
@@ -9896,7 +9939,7 @@
           <p:cNvPr id="5" name="day2-workload">
             <a:extLst xmlns:a="http://schemas.openxmlformats.org/drawingml/2006/main">
               <a:ext uri="{FF2B5EF4-FFF2-40B4-BE49-F238E27FC236}">
-                <a16:creationId xmlns:a16="http://schemas.microsoft.com/office/drawing/2014/main" id="{9A02F359-F63E-44B8-BDB1-06EA161A23C5}"/>
+                <a16:creationId xmlns:a16="http://schemas.microsoft.com/office/drawing/2014/main" id="{1F9E222B-2A27-4386-A172-1096112769E5}"/>
               </a:ext>
             </a:extLst>
           </p:cNvPr>
@@ -9976,7 +10019,7 @@
           <p:cNvPr id="6" name="day2-change">
             <a:extLst xmlns:a="http://schemas.openxmlformats.org/drawingml/2006/main">
               <a:ext uri="{FF2B5EF4-FFF2-40B4-BE49-F238E27FC236}">
-                <a16:creationId xmlns:a16="http://schemas.microsoft.com/office/drawing/2014/main" id="{1CCE739E-1F68-40A8-999B-920FBBD82992}"/>
+                <a16:creationId xmlns:a16="http://schemas.microsoft.com/office/drawing/2014/main" id="{224F4CD8-0E44-45F7-B91B-DE70B2A33F65}"/>
               </a:ext>
             </a:extLst>
           </p:cNvPr>
@@ -10108,7 +10151,7 @@
           <p:cNvPr id="7" name="eyebrow">
             <a:extLst xmlns:a="http://schemas.openxmlformats.org/drawingml/2006/main">
               <a:ext uri="{FF2B5EF4-FFF2-40B4-BE49-F238E27FC236}">
-                <a16:creationId xmlns:a16="http://schemas.microsoft.com/office/drawing/2014/main" id="{5DDD6E2F-2CC9-40CD-AC70-9FBECB46189F}"/>
+                <a16:creationId xmlns:a16="http://schemas.microsoft.com/office/drawing/2014/main" id="{5BDBE732-8942-483E-9BDE-626FB9928EC4}"/>
               </a:ext>
             </a:extLst>
           </p:cNvPr>
@@ -10165,7 +10208,7 @@
           <p:cNvPr id="2" name="slide-title">
             <a:extLst xmlns:a="http://schemas.openxmlformats.org/drawingml/2006/main">
               <a:ext uri="{FF2B5EF4-FFF2-40B4-BE49-F238E27FC236}">
-                <a16:creationId xmlns:a16="http://schemas.microsoft.com/office/drawing/2014/main" id="{293EF795-B306-4A78-8D93-85EE5EC64FA7}"/>
+                <a16:creationId xmlns:a16="http://schemas.microsoft.com/office/drawing/2014/main" id="{A8F23B8D-B5BE-4D3E-80BD-A4683D3C0AFF}"/>
               </a:ext>
             </a:extLst>
           </p:cNvPr>
@@ -10222,7 +10265,7 @@
           <p:cNvPr id="3" name="">
             <a:extLst xmlns:a="http://schemas.openxmlformats.org/drawingml/2006/main">
               <a:ext uri="{FF2B5EF4-FFF2-40B4-BE49-F238E27FC236}">
-                <a16:creationId xmlns:a16="http://schemas.microsoft.com/office/drawing/2014/main" id="{5027069F-B6BA-4698-820A-6EBAB7DB3B74}"/>
+                <a16:creationId xmlns:a16="http://schemas.microsoft.com/office/drawing/2014/main" id="{B815B1FD-2C50-4654-8FF9-F6DA848395D4}"/>
               </a:ext>
             </a:extLst>
           </p:cNvPr>
@@ -10254,7 +10297,7 @@
           <p:cNvPr id="4" name="slide-number">
             <a:extLst xmlns:a="http://schemas.openxmlformats.org/drawingml/2006/main">
               <a:ext uri="{FF2B5EF4-FFF2-40B4-BE49-F238E27FC236}">
-                <a16:creationId xmlns:a16="http://schemas.microsoft.com/office/drawing/2014/main" id="{BE602793-B496-4C1F-AD07-560B18E86638}"/>
+                <a16:creationId xmlns:a16="http://schemas.microsoft.com/office/drawing/2014/main" id="{DEAF76EC-5EF9-4371-A16F-C3F0580A61C0}"/>
               </a:ext>
             </a:extLst>
           </p:cNvPr>
@@ -10630,7 +10673,7 @@
           <p:cNvPr id="6" name="cardinality-limit">
             <a:extLst xmlns:a="http://schemas.openxmlformats.org/drawingml/2006/main">
               <a:ext uri="{FF2B5EF4-FFF2-40B4-BE49-F238E27FC236}">
-                <a16:creationId xmlns:a16="http://schemas.microsoft.com/office/drawing/2014/main" id="{25B00FB9-0D77-4EA2-A80F-29292455AE3A}"/>
+                <a16:creationId xmlns:a16="http://schemas.microsoft.com/office/drawing/2014/main" id="{6D7C346B-B628-464C-9FFE-B7C36AFF48F1}"/>
               </a:ext>
             </a:extLst>
           </p:cNvPr>
@@ -10739,7 +10782,7 @@
           <p:cNvPr id="7" name="eyebrow">
             <a:extLst xmlns:a="http://schemas.openxmlformats.org/drawingml/2006/main">
               <a:ext uri="{FF2B5EF4-FFF2-40B4-BE49-F238E27FC236}">
-                <a16:creationId xmlns:a16="http://schemas.microsoft.com/office/drawing/2014/main" id="{38867337-8220-471B-9514-9C4541B45473}"/>
+                <a16:creationId xmlns:a16="http://schemas.microsoft.com/office/drawing/2014/main" id="{BB0A081D-E971-446E-9684-C79EA1EB3CBC}"/>
               </a:ext>
             </a:extLst>
           </p:cNvPr>
@@ -10796,7 +10839,7 @@
           <p:cNvPr id="2" name="slide-title">
             <a:extLst xmlns:a="http://schemas.openxmlformats.org/drawingml/2006/main">
               <a:ext uri="{FF2B5EF4-FFF2-40B4-BE49-F238E27FC236}">
-                <a16:creationId xmlns:a16="http://schemas.microsoft.com/office/drawing/2014/main" id="{9BAB5656-C14C-48FF-800D-830CCF2E9ADA}"/>
+                <a16:creationId xmlns:a16="http://schemas.microsoft.com/office/drawing/2014/main" id="{E91BDB63-2F20-4898-BB62-030771A523E4}"/>
               </a:ext>
             </a:extLst>
           </p:cNvPr>
@@ -10853,7 +10896,7 @@
           <p:cNvPr id="3" name="">
             <a:extLst xmlns:a="http://schemas.openxmlformats.org/drawingml/2006/main">
               <a:ext uri="{FF2B5EF4-FFF2-40B4-BE49-F238E27FC236}">
-                <a16:creationId xmlns:a16="http://schemas.microsoft.com/office/drawing/2014/main" id="{556AF8C8-6D0A-4081-80E5-AF978FBAD5A0}"/>
+                <a16:creationId xmlns:a16="http://schemas.microsoft.com/office/drawing/2014/main" id="{A24309B1-08FA-4204-957F-A4535840B1AD}"/>
               </a:ext>
             </a:extLst>
           </p:cNvPr>
@@ -10885,7 +10928,7 @@
           <p:cNvPr id="4" name="slide-number">
             <a:extLst xmlns:a="http://schemas.openxmlformats.org/drawingml/2006/main">
               <a:ext uri="{FF2B5EF4-FFF2-40B4-BE49-F238E27FC236}">
-                <a16:creationId xmlns:a16="http://schemas.microsoft.com/office/drawing/2014/main" id="{050089C7-AAEA-415F-B7C7-4B33CE219DDA}"/>
+                <a16:creationId xmlns:a16="http://schemas.microsoft.com/office/drawing/2014/main" id="{FDC33429-0F06-476B-B4E8-67066076A0DA}"/>
               </a:ext>
             </a:extLst>
           </p:cNvPr>
@@ -11335,7 +11378,7 @@
           <p:cNvPr id="6" name="bridge-caution">
             <a:extLst xmlns:a="http://schemas.openxmlformats.org/drawingml/2006/main">
               <a:ext uri="{FF2B5EF4-FFF2-40B4-BE49-F238E27FC236}">
-                <a16:creationId xmlns:a16="http://schemas.microsoft.com/office/drawing/2014/main" id="{1C8FD13C-E2B9-4A61-9D39-A514031F84B5}"/>
+                <a16:creationId xmlns:a16="http://schemas.microsoft.com/office/drawing/2014/main" id="{646929C2-7358-4563-B97D-D9C949050E31}"/>
               </a:ext>
             </a:extLst>
           </p:cNvPr>
@@ -11444,7 +11487,7 @@
           <p:cNvPr id="9" name="eyebrow">
             <a:extLst xmlns:a="http://schemas.openxmlformats.org/drawingml/2006/main">
               <a:ext uri="{FF2B5EF4-FFF2-40B4-BE49-F238E27FC236}">
-                <a16:creationId xmlns:a16="http://schemas.microsoft.com/office/drawing/2014/main" id="{538FB1CF-29D1-4522-A4F8-7CD0A8B0FDFF}"/>
+                <a16:creationId xmlns:a16="http://schemas.microsoft.com/office/drawing/2014/main" id="{8C75D8EC-4B71-49FE-AD48-21948DE8BBF1}"/>
               </a:ext>
             </a:extLst>
           </p:cNvPr>
@@ -11501,7 +11544,7 @@
           <p:cNvPr id="2" name="slide-title">
             <a:extLst xmlns:a="http://schemas.openxmlformats.org/drawingml/2006/main">
               <a:ext uri="{FF2B5EF4-FFF2-40B4-BE49-F238E27FC236}">
-                <a16:creationId xmlns:a16="http://schemas.microsoft.com/office/drawing/2014/main" id="{3FDD2AB7-F829-4F9E-8AD0-8FF20DE29A95}"/>
+                <a16:creationId xmlns:a16="http://schemas.microsoft.com/office/drawing/2014/main" id="{CA5755A3-E98A-4614-8C8E-6CF2D8BD44FA}"/>
               </a:ext>
             </a:extLst>
           </p:cNvPr>
@@ -11558,7 +11601,7 @@
           <p:cNvPr id="3" name="">
             <a:extLst xmlns:a="http://schemas.openxmlformats.org/drawingml/2006/main">
               <a:ext uri="{FF2B5EF4-FFF2-40B4-BE49-F238E27FC236}">
-                <a16:creationId xmlns:a16="http://schemas.microsoft.com/office/drawing/2014/main" id="{CBB42CBC-868F-493C-B724-772AA778D29B}"/>
+                <a16:creationId xmlns:a16="http://schemas.microsoft.com/office/drawing/2014/main" id="{7DB60EAB-BB43-46AA-A104-A986FC3C416A}"/>
               </a:ext>
             </a:extLst>
           </p:cNvPr>
@@ -11590,7 +11633,7 @@
           <p:cNvPr id="4" name="slide-number">
             <a:extLst xmlns:a="http://schemas.openxmlformats.org/drawingml/2006/main">
               <a:ext uri="{FF2B5EF4-FFF2-40B4-BE49-F238E27FC236}">
-                <a16:creationId xmlns:a16="http://schemas.microsoft.com/office/drawing/2014/main" id="{02635F7F-13A5-4F3D-868E-5F2EBAEA4614}"/>
+                <a16:creationId xmlns:a16="http://schemas.microsoft.com/office/drawing/2014/main" id="{936F981E-8F85-41E6-B5F2-62FB14DA6977}"/>
               </a:ext>
             </a:extLst>
           </p:cNvPr>
@@ -11647,7 +11690,7 @@
           <p:cNvPr id="5" name="live-resource">
             <a:extLst xmlns:a="http://schemas.openxmlformats.org/drawingml/2006/main">
               <a:ext uri="{FF2B5EF4-FFF2-40B4-BE49-F238E27FC236}">
-                <a16:creationId xmlns:a16="http://schemas.microsoft.com/office/drawing/2014/main" id="{708DDCC9-2D90-4156-AA51-6E3FFAA1C09D}"/>
+                <a16:creationId xmlns:a16="http://schemas.microsoft.com/office/drawing/2014/main" id="{2AEA87A9-E2D7-4137-8745-D3FB8C6A1CE6}"/>
               </a:ext>
             </a:extLst>
           </p:cNvPr>
@@ -11750,7 +11793,7 @@
           <p:cNvPr id="6" name="">
             <a:extLst xmlns:a="http://schemas.openxmlformats.org/drawingml/2006/main">
               <a:ext uri="{FF2B5EF4-FFF2-40B4-BE49-F238E27FC236}">
-                <a16:creationId xmlns:a16="http://schemas.microsoft.com/office/drawing/2014/main" id="{A2531A95-06E0-40A0-A6B0-D9894A8B3D49}"/>
+                <a16:creationId xmlns:a16="http://schemas.microsoft.com/office/drawing/2014/main" id="{59030A8F-B558-40E4-BFEB-AE53BAEB595E}"/>
               </a:ext>
             </a:extLst>
           </p:cNvPr>
@@ -11782,7 +11825,7 @@
           <p:cNvPr id="7" name="json-one-to-one">
             <a:extLst xmlns:a="http://schemas.openxmlformats.org/drawingml/2006/main">
               <a:ext uri="{FF2B5EF4-FFF2-40B4-BE49-F238E27FC236}">
-                <a16:creationId xmlns:a16="http://schemas.microsoft.com/office/drawing/2014/main" id="{C15AA6A4-5C06-4BAD-AE86-F82419CB532D}"/>
+                <a16:creationId xmlns:a16="http://schemas.microsoft.com/office/drawing/2014/main" id="{A114F262-C618-4A4D-9DCF-3DD9CEE2AFA9}"/>
               </a:ext>
             </a:extLst>
           </p:cNvPr>
@@ -11931,7 +11974,7 @@
           <p:cNvPr id="8" name="live-boundary">
             <a:extLst xmlns:a="http://schemas.openxmlformats.org/drawingml/2006/main">
               <a:ext uri="{FF2B5EF4-FFF2-40B4-BE49-F238E27FC236}">
-                <a16:creationId xmlns:a16="http://schemas.microsoft.com/office/drawing/2014/main" id="{295F106D-4B01-4540-95BE-643ECE045B76}"/>
+                <a16:creationId xmlns:a16="http://schemas.microsoft.com/office/drawing/2014/main" id="{74738FA8-DBD7-41C4-AE7E-FF6B89EF7188}"/>
               </a:ext>
             </a:extLst>
           </p:cNvPr>
@@ -12040,7 +12083,7 @@
           <p:cNvPr id="9" name="eyebrow">
             <a:extLst xmlns:a="http://schemas.openxmlformats.org/drawingml/2006/main">
               <a:ext uri="{FF2B5EF4-FFF2-40B4-BE49-F238E27FC236}">
-                <a16:creationId xmlns:a16="http://schemas.microsoft.com/office/drawing/2014/main" id="{FA7BF7B6-9A89-437F-B630-037F6FD4C0B1}"/>
+                <a16:creationId xmlns:a16="http://schemas.microsoft.com/office/drawing/2014/main" id="{7C0FCE1C-2F50-4043-8A61-EB63CB16CBCB}"/>
               </a:ext>
             </a:extLst>
           </p:cNvPr>
@@ -12097,7 +12140,7 @@
           <p:cNvPr id="2" name="slide-title">
             <a:extLst xmlns:a="http://schemas.openxmlformats.org/drawingml/2006/main">
               <a:ext uri="{FF2B5EF4-FFF2-40B4-BE49-F238E27FC236}">
-                <a16:creationId xmlns:a16="http://schemas.microsoft.com/office/drawing/2014/main" id="{79D95188-1FF8-44C7-B013-34EE4DEC22B4}"/>
+                <a16:creationId xmlns:a16="http://schemas.microsoft.com/office/drawing/2014/main" id="{B17F726E-F0C7-4096-8A7E-CB1851B12B10}"/>
               </a:ext>
             </a:extLst>
           </p:cNvPr>
@@ -12154,7 +12197,7 @@
           <p:cNvPr id="3" name="">
             <a:extLst xmlns:a="http://schemas.openxmlformats.org/drawingml/2006/main">
               <a:ext uri="{FF2B5EF4-FFF2-40B4-BE49-F238E27FC236}">
-                <a16:creationId xmlns:a16="http://schemas.microsoft.com/office/drawing/2014/main" id="{F9498528-16C3-4A9B-8F10-AE25F72800E8}"/>
+                <a16:creationId xmlns:a16="http://schemas.microsoft.com/office/drawing/2014/main" id="{F381DAB5-1F19-41FD-836E-30710CB0129C}"/>
               </a:ext>
             </a:extLst>
           </p:cNvPr>
@@ -12186,7 +12229,7 @@
           <p:cNvPr id="4" name="slide-number">
             <a:extLst xmlns:a="http://schemas.openxmlformats.org/drawingml/2006/main">
               <a:ext uri="{FF2B5EF4-FFF2-40B4-BE49-F238E27FC236}">
-                <a16:creationId xmlns:a16="http://schemas.microsoft.com/office/drawing/2014/main" id="{D3930B9D-8D98-4C1F-B776-9FE0CB92E334}"/>
+                <a16:creationId xmlns:a16="http://schemas.microsoft.com/office/drawing/2014/main" id="{D36E33BF-7325-4855-BF29-D5D0545DB218}"/>
               </a:ext>
             </a:extLst>
           </p:cNvPr>
@@ -12243,7 +12286,7 @@
           <p:cNvPr id="5" name="">
             <a:extLst xmlns:a="http://schemas.openxmlformats.org/drawingml/2006/main">
               <a:ext uri="{FF2B5EF4-FFF2-40B4-BE49-F238E27FC236}">
-                <a16:creationId xmlns:a16="http://schemas.microsoft.com/office/drawing/2014/main" id="{B3A98D1B-EC6A-4FF4-AECC-F5833AB440AC}"/>
+                <a16:creationId xmlns:a16="http://schemas.microsoft.com/office/drawing/2014/main" id="{69322AE6-4946-48C8-BC2B-536DCE5A8DA6}"/>
               </a:ext>
             </a:extLst>
           </p:cNvPr>
@@ -12275,7 +12318,7 @@
           <p:cNvPr id="6" name="python-atomic">
             <a:extLst xmlns:a="http://schemas.openxmlformats.org/drawingml/2006/main">
               <a:ext uri="{FF2B5EF4-FFF2-40B4-BE49-F238E27FC236}">
-                <a16:creationId xmlns:a16="http://schemas.microsoft.com/office/drawing/2014/main" id="{45866847-576F-4F7A-A7D1-EB93AF0BD5AD}"/>
+                <a16:creationId xmlns:a16="http://schemas.microsoft.com/office/drawing/2014/main" id="{3E4ED85F-889C-4F36-8E42-5F1EA47FC6A8}"/>
               </a:ext>
             </a:extLst>
           </p:cNvPr>
@@ -12539,7 +12582,7 @@
           <p:cNvPr id="7" name="atomic-meaning">
             <a:extLst xmlns:a="http://schemas.openxmlformats.org/drawingml/2006/main">
               <a:ext uri="{FF2B5EF4-FFF2-40B4-BE49-F238E27FC236}">
-                <a16:creationId xmlns:a16="http://schemas.microsoft.com/office/drawing/2014/main" id="{29B81D5B-D28F-4CCF-90C2-53FD5F0AFCD2}"/>
+                <a16:creationId xmlns:a16="http://schemas.microsoft.com/office/drawing/2014/main" id="{36458BA5-A994-4284-9D74-B44785418D63}"/>
               </a:ext>
             </a:extLst>
           </p:cNvPr>
@@ -12619,7 +12662,7 @@
           <p:cNvPr id="8" name="atomic-scope">
             <a:extLst xmlns:a="http://schemas.openxmlformats.org/drawingml/2006/main">
               <a:ext uri="{FF2B5EF4-FFF2-40B4-BE49-F238E27FC236}">
-                <a16:creationId xmlns:a16="http://schemas.microsoft.com/office/drawing/2014/main" id="{0F4FA5BD-D8FC-4961-862D-F035BB5609C0}"/>
+                <a16:creationId xmlns:a16="http://schemas.microsoft.com/office/drawing/2014/main" id="{6FACEC2E-1E0E-4819-B5C1-47A4B938A2A6}"/>
               </a:ext>
             </a:extLst>
           </p:cNvPr>
@@ -12705,7 +12748,7 @@
           <p:cNvPr id="7" name="eyebrow">
             <a:extLst xmlns:a="http://schemas.openxmlformats.org/drawingml/2006/main">
               <a:ext uri="{FF2B5EF4-FFF2-40B4-BE49-F238E27FC236}">
-                <a16:creationId xmlns:a16="http://schemas.microsoft.com/office/drawing/2014/main" id="{B1761F62-0449-4E4E-B553-7E9D60827EBC}"/>
+                <a16:creationId xmlns:a16="http://schemas.microsoft.com/office/drawing/2014/main" id="{9AB588D1-4740-437A-8370-C515A658D58C}"/>
               </a:ext>
             </a:extLst>
           </p:cNvPr>
@@ -12762,7 +12805,7 @@
           <p:cNvPr id="2" name="slide-title">
             <a:extLst xmlns:a="http://schemas.openxmlformats.org/drawingml/2006/main">
               <a:ext uri="{FF2B5EF4-FFF2-40B4-BE49-F238E27FC236}">
-                <a16:creationId xmlns:a16="http://schemas.microsoft.com/office/drawing/2014/main" id="{0DD298CA-DA1B-468A-9396-62EC5E2500C0}"/>
+                <a16:creationId xmlns:a16="http://schemas.microsoft.com/office/drawing/2014/main" id="{431B809D-9EB9-41AA-AC6A-A12BA5121907}"/>
               </a:ext>
             </a:extLst>
           </p:cNvPr>
@@ -12819,7 +12862,7 @@
           <p:cNvPr id="3" name="">
             <a:extLst xmlns:a="http://schemas.openxmlformats.org/drawingml/2006/main">
               <a:ext uri="{FF2B5EF4-FFF2-40B4-BE49-F238E27FC236}">
-                <a16:creationId xmlns:a16="http://schemas.microsoft.com/office/drawing/2014/main" id="{78AA033F-FDCA-42B6-8BFB-26FA43CC68C0}"/>
+                <a16:creationId xmlns:a16="http://schemas.microsoft.com/office/drawing/2014/main" id="{4E1A15E2-7536-43CF-A197-9068F80CFA57}"/>
               </a:ext>
             </a:extLst>
           </p:cNvPr>
@@ -12851,7 +12894,7 @@
           <p:cNvPr id="4" name="slide-number">
             <a:extLst xmlns:a="http://schemas.openxmlformats.org/drawingml/2006/main">
               <a:ext uri="{FF2B5EF4-FFF2-40B4-BE49-F238E27FC236}">
-                <a16:creationId xmlns:a16="http://schemas.microsoft.com/office/drawing/2014/main" id="{7E2BCEB3-ACE7-4C2C-A5E7-8BE3B5C6D10F}"/>
+                <a16:creationId xmlns:a16="http://schemas.microsoft.com/office/drawing/2014/main" id="{CCDC7A54-20A8-44FF-A17C-062EE4960E02}"/>
               </a:ext>
             </a:extLst>
           </p:cNvPr>
@@ -13227,7 +13270,7 @@
           <p:cNvPr id="6" name="contact-rule">
             <a:extLst xmlns:a="http://schemas.openxmlformats.org/drawingml/2006/main">
               <a:ext uri="{FF2B5EF4-FFF2-40B4-BE49-F238E27FC236}">
-                <a16:creationId xmlns:a16="http://schemas.microsoft.com/office/drawing/2014/main" id="{3CB8A768-305C-4AC7-9BB7-655EF02DD8C6}"/>
+                <a16:creationId xmlns:a16="http://schemas.microsoft.com/office/drawing/2014/main" id="{26CE2209-969B-4523-BA37-CA18B74F82D3}"/>
               </a:ext>
             </a:extLst>
           </p:cNvPr>
@@ -13336,7 +13379,7 @@
           <p:cNvPr id="10" name="eyebrow">
             <a:extLst xmlns:a="http://schemas.openxmlformats.org/drawingml/2006/main">
               <a:ext uri="{FF2B5EF4-FFF2-40B4-BE49-F238E27FC236}">
-                <a16:creationId xmlns:a16="http://schemas.microsoft.com/office/drawing/2014/main" id="{A61F44E7-CE3D-4B4D-835E-7247C5EDEBE9}"/>
+                <a16:creationId xmlns:a16="http://schemas.microsoft.com/office/drawing/2014/main" id="{8B861A7F-71B3-4CAF-9C76-0AAF682DF4D6}"/>
               </a:ext>
             </a:extLst>
           </p:cNvPr>
@@ -13393,7 +13436,7 @@
           <p:cNvPr id="2" name="slide-title">
             <a:extLst xmlns:a="http://schemas.openxmlformats.org/drawingml/2006/main">
               <a:ext uri="{FF2B5EF4-FFF2-40B4-BE49-F238E27FC236}">
-                <a16:creationId xmlns:a16="http://schemas.microsoft.com/office/drawing/2014/main" id="{EF03FBE7-5811-41F9-83A9-8163C635C193}"/>
+                <a16:creationId xmlns:a16="http://schemas.microsoft.com/office/drawing/2014/main" id="{B4DA72FB-A7A9-4041-BC5F-A49FF8648E3E}"/>
               </a:ext>
             </a:extLst>
           </p:cNvPr>
@@ -13450,7 +13493,7 @@
           <p:cNvPr id="3" name="">
             <a:extLst xmlns:a="http://schemas.openxmlformats.org/drawingml/2006/main">
               <a:ext uri="{FF2B5EF4-FFF2-40B4-BE49-F238E27FC236}">
-                <a16:creationId xmlns:a16="http://schemas.microsoft.com/office/drawing/2014/main" id="{D0E6FF9C-A9FA-4B82-91E8-C66024CB4091}"/>
+                <a16:creationId xmlns:a16="http://schemas.microsoft.com/office/drawing/2014/main" id="{0183C103-23BB-4B8B-9444-33F6C15AC5A8}"/>
               </a:ext>
             </a:extLst>
           </p:cNvPr>
@@ -13482,7 +13525,7 @@
           <p:cNvPr id="4" name="slide-number">
             <a:extLst xmlns:a="http://schemas.openxmlformats.org/drawingml/2006/main">
               <a:ext uri="{FF2B5EF4-FFF2-40B4-BE49-F238E27FC236}">
-                <a16:creationId xmlns:a16="http://schemas.microsoft.com/office/drawing/2014/main" id="{84BB5D8A-97E8-45CD-9667-2E6E4A97F214}"/>
+                <a16:creationId xmlns:a16="http://schemas.microsoft.com/office/drawing/2014/main" id="{00FA8F93-2545-429B-B8FA-B0E41E6350E9}"/>
               </a:ext>
             </a:extLst>
           </p:cNvPr>
@@ -13539,7 +13582,7 @@
           <p:cNvPr id="5" name="">
             <a:extLst xmlns:a="http://schemas.openxmlformats.org/drawingml/2006/main">
               <a:ext uri="{FF2B5EF4-FFF2-40B4-BE49-F238E27FC236}">
-                <a16:creationId xmlns:a16="http://schemas.microsoft.com/office/drawing/2014/main" id="{C91BB635-1CC0-47C2-AA5E-2A45A87C07AA}"/>
+                <a16:creationId xmlns:a16="http://schemas.microsoft.com/office/drawing/2014/main" id="{3E7A60D7-7BDB-452C-97F5-BDA5CB405E20}"/>
               </a:ext>
             </a:extLst>
           </p:cNvPr>
@@ -13571,7 +13614,7 @@
           <p:cNvPr id="6" name="json-reference-ticket">
             <a:extLst xmlns:a="http://schemas.openxmlformats.org/drawingml/2006/main">
               <a:ext uri="{FF2B5EF4-FFF2-40B4-BE49-F238E27FC236}">
-                <a16:creationId xmlns:a16="http://schemas.microsoft.com/office/drawing/2014/main" id="{F4C16425-7655-4D2C-A32B-4BA796CA5537}"/>
+                <a16:creationId xmlns:a16="http://schemas.microsoft.com/office/drawing/2014/main" id="{8544705E-7198-49F6-BDC6-B31E86D59E8C}"/>
               </a:ext>
             </a:extLst>
           </p:cNvPr>
@@ -13628,7 +13671,7 @@
           <p:cNvPr id="7" name="">
             <a:extLst xmlns:a="http://schemas.openxmlformats.org/drawingml/2006/main">
               <a:ext uri="{FF2B5EF4-FFF2-40B4-BE49-F238E27FC236}">
-                <a16:creationId xmlns:a16="http://schemas.microsoft.com/office/drawing/2014/main" id="{030479BF-2098-4B4C-BFD0-4BA4BA538D79}"/>
+                <a16:creationId xmlns:a16="http://schemas.microsoft.com/office/drawing/2014/main" id="{8BABC841-750B-436C-A448-2B2E3DE72A04}"/>
               </a:ext>
             </a:extLst>
           </p:cNvPr>
@@ -13660,7 +13703,7 @@
           <p:cNvPr id="8" name="json-reference-event">
             <a:extLst xmlns:a="http://schemas.openxmlformats.org/drawingml/2006/main">
               <a:ext uri="{FF2B5EF4-FFF2-40B4-BE49-F238E27FC236}">
-                <a16:creationId xmlns:a16="http://schemas.microsoft.com/office/drawing/2014/main" id="{A5BE5620-E082-4930-9D89-B751C68F5CD6}"/>
+                <a16:creationId xmlns:a16="http://schemas.microsoft.com/office/drawing/2014/main" id="{3E92B1E9-E564-4DB3-969C-E9BC13DB290F}"/>
               </a:ext>
             </a:extLst>
           </p:cNvPr>
@@ -13832,7 +13875,7 @@
           <p:cNvPr id="9" name="reference-semantics">
             <a:extLst xmlns:a="http://schemas.openxmlformats.org/drawingml/2006/main">
               <a:ext uri="{FF2B5EF4-FFF2-40B4-BE49-F238E27FC236}">
-                <a16:creationId xmlns:a16="http://schemas.microsoft.com/office/drawing/2014/main" id="{3A9D3B8D-A8A6-4554-90D8-31238CC3AD29}"/>
+                <a16:creationId xmlns:a16="http://schemas.microsoft.com/office/drawing/2014/main" id="{B193D734-ABB6-4958-91EA-0901CB43A8E6}"/>
               </a:ext>
             </a:extLst>
           </p:cNvPr>
@@ -13941,7 +13984,7 @@
           <p:cNvPr id="9" name="eyebrow">
             <a:extLst xmlns:a="http://schemas.openxmlformats.org/drawingml/2006/main">
               <a:ext uri="{FF2B5EF4-FFF2-40B4-BE49-F238E27FC236}">
-                <a16:creationId xmlns:a16="http://schemas.microsoft.com/office/drawing/2014/main" id="{CF3FEFCD-3897-423D-B66D-1057FF68DB7C}"/>
+                <a16:creationId xmlns:a16="http://schemas.microsoft.com/office/drawing/2014/main" id="{606E7994-3C71-4939-8017-8B99777263EB}"/>
               </a:ext>
             </a:extLst>
           </p:cNvPr>
@@ -13998,7 +14041,7 @@
           <p:cNvPr id="2" name="slide-title">
             <a:extLst xmlns:a="http://schemas.openxmlformats.org/drawingml/2006/main">
               <a:ext uri="{FF2B5EF4-FFF2-40B4-BE49-F238E27FC236}">
-                <a16:creationId xmlns:a16="http://schemas.microsoft.com/office/drawing/2014/main" id="{E74FADCB-B846-4CC0-BB43-2651ADA96EE4}"/>
+                <a16:creationId xmlns:a16="http://schemas.microsoft.com/office/drawing/2014/main" id="{B4B57F3E-0B0C-4BF6-A7DA-33BEF3EAEB75}"/>
               </a:ext>
             </a:extLst>
           </p:cNvPr>
@@ -14055,7 +14098,7 @@
           <p:cNvPr id="3" name="">
             <a:extLst xmlns:a="http://schemas.openxmlformats.org/drawingml/2006/main">
               <a:ext uri="{FF2B5EF4-FFF2-40B4-BE49-F238E27FC236}">
-                <a16:creationId xmlns:a16="http://schemas.microsoft.com/office/drawing/2014/main" id="{0401A6BC-2013-46DE-BCE7-3AF499FEC972}"/>
+                <a16:creationId xmlns:a16="http://schemas.microsoft.com/office/drawing/2014/main" id="{8AB6254C-C391-4B40-9088-040796EC6C01}"/>
               </a:ext>
             </a:extLst>
           </p:cNvPr>
@@ -14087,7 +14130,7 @@
           <p:cNvPr id="4" name="slide-number">
             <a:extLst xmlns:a="http://schemas.openxmlformats.org/drawingml/2006/main">
               <a:ext uri="{FF2B5EF4-FFF2-40B4-BE49-F238E27FC236}">
-                <a16:creationId xmlns:a16="http://schemas.microsoft.com/office/drawing/2014/main" id="{D55D3A65-C8E9-46AF-95DB-4BE521728CF0}"/>
+                <a16:creationId xmlns:a16="http://schemas.microsoft.com/office/drawing/2014/main" id="{7EFCBC8C-764E-4739-9B68-B881614DBE22}"/>
               </a:ext>
             </a:extLst>
           </p:cNvPr>
@@ -14144,7 +14187,7 @@
           <p:cNvPr id="5" name="">
             <a:extLst xmlns:a="http://schemas.openxmlformats.org/drawingml/2006/main">
               <a:ext uri="{FF2B5EF4-FFF2-40B4-BE49-F238E27FC236}">
-                <a16:creationId xmlns:a16="http://schemas.microsoft.com/office/drawing/2014/main" id="{69CDAD7E-0544-4065-86C2-AB4C219CB8D6}"/>
+                <a16:creationId xmlns:a16="http://schemas.microsoft.com/office/drawing/2014/main" id="{54852C47-67C5-4D1B-8DEA-20310B3E8B85}"/>
               </a:ext>
             </a:extLst>
           </p:cNvPr>
@@ -14176,7 +14219,7 @@
           <p:cNvPr id="6" name="python-page">
             <a:extLst xmlns:a="http://schemas.openxmlformats.org/drawingml/2006/main">
               <a:ext uri="{FF2B5EF4-FFF2-40B4-BE49-F238E27FC236}">
-                <a16:creationId xmlns:a16="http://schemas.microsoft.com/office/drawing/2014/main" id="{ECB103F0-6F8B-43A9-85D5-26579373876D}"/>
+                <a16:creationId xmlns:a16="http://schemas.microsoft.com/office/drawing/2014/main" id="{6C6DEE72-5F80-46FB-9CEF-D3E651624DB6}"/>
               </a:ext>
             </a:extLst>
           </p:cNvPr>
@@ -14371,7 +14414,7 @@
           <p:cNvPr id="7" name="page-result">
             <a:extLst xmlns:a="http://schemas.openxmlformats.org/drawingml/2006/main">
               <a:ext uri="{FF2B5EF4-FFF2-40B4-BE49-F238E27FC236}">
-                <a16:creationId xmlns:a16="http://schemas.microsoft.com/office/drawing/2014/main" id="{E54D7DCA-7107-4357-B5D3-3E4E299D1B2E}"/>
+                <a16:creationId xmlns:a16="http://schemas.microsoft.com/office/drawing/2014/main" id="{1EF2D4E9-3F90-4B70-B25A-90E9E8877CFF}"/>
               </a:ext>
             </a:extLst>
           </p:cNvPr>
@@ -14451,7 +14494,7 @@
           <p:cNvPr id="8" name="page-index">
             <a:extLst xmlns:a="http://schemas.openxmlformats.org/drawingml/2006/main">
               <a:ext uri="{FF2B5EF4-FFF2-40B4-BE49-F238E27FC236}">
-                <a16:creationId xmlns:a16="http://schemas.microsoft.com/office/drawing/2014/main" id="{150966C0-6968-4B34-A9D4-45D895BB6A3D}"/>
+                <a16:creationId xmlns:a16="http://schemas.microsoft.com/office/drawing/2014/main" id="{1A848DA1-F5FE-498F-8BC9-0878536AB8B0}"/>
               </a:ext>
             </a:extLst>
           </p:cNvPr>
@@ -14537,7 +14580,7 @@
           <p:cNvPr id="8" name="eyebrow">
             <a:extLst xmlns:a="http://schemas.openxmlformats.org/drawingml/2006/main">
               <a:ext uri="{FF2B5EF4-FFF2-40B4-BE49-F238E27FC236}">
-                <a16:creationId xmlns:a16="http://schemas.microsoft.com/office/drawing/2014/main" id="{3E1B9E49-231C-4EB2-9F09-20D9A2AFE9E2}"/>
+                <a16:creationId xmlns:a16="http://schemas.microsoft.com/office/drawing/2014/main" id="{8CECCED3-5A47-4C0F-926A-913CB5DE2DE4}"/>
               </a:ext>
             </a:extLst>
           </p:cNvPr>
@@ -14594,7 +14637,7 @@
           <p:cNvPr id="2" name="slide-title">
             <a:extLst xmlns:a="http://schemas.openxmlformats.org/drawingml/2006/main">
               <a:ext uri="{FF2B5EF4-FFF2-40B4-BE49-F238E27FC236}">
-                <a16:creationId xmlns:a16="http://schemas.microsoft.com/office/drawing/2014/main" id="{0FD4FE84-89C9-4FD3-B37A-58D4DE782BC3}"/>
+                <a16:creationId xmlns:a16="http://schemas.microsoft.com/office/drawing/2014/main" id="{C2D131BC-7546-4CA5-9285-076D99139B6C}"/>
               </a:ext>
             </a:extLst>
           </p:cNvPr>
@@ -14651,7 +14694,7 @@
           <p:cNvPr id="3" name="">
             <a:extLst xmlns:a="http://schemas.openxmlformats.org/drawingml/2006/main">
               <a:ext uri="{FF2B5EF4-FFF2-40B4-BE49-F238E27FC236}">
-                <a16:creationId xmlns:a16="http://schemas.microsoft.com/office/drawing/2014/main" id="{0B77AFE5-1C56-4F18-ACAE-A7387A52F5D6}"/>
+                <a16:creationId xmlns:a16="http://schemas.microsoft.com/office/drawing/2014/main" id="{61C7D524-F01F-49F1-82FB-5695CEB8AA2D}"/>
               </a:ext>
             </a:extLst>
           </p:cNvPr>
@@ -14683,7 +14726,7 @@
           <p:cNvPr id="4" name="slide-number">
             <a:extLst xmlns:a="http://schemas.openxmlformats.org/drawingml/2006/main">
               <a:ext uri="{FF2B5EF4-FFF2-40B4-BE49-F238E27FC236}">
-                <a16:creationId xmlns:a16="http://schemas.microsoft.com/office/drawing/2014/main" id="{3600CB18-95F2-448D-921B-B11CD5B87B54}"/>
+                <a16:creationId xmlns:a16="http://schemas.microsoft.com/office/drawing/2014/main" id="{24BDCBEF-BC60-45AE-B509-FF40FCF04FE8}"/>
               </a:ext>
             </a:extLst>
           </p:cNvPr>
@@ -15059,7 +15102,7 @@
           <p:cNvPr id="6" name="size-limit">
             <a:extLst xmlns:a="http://schemas.openxmlformats.org/drawingml/2006/main">
               <a:ext uri="{FF2B5EF4-FFF2-40B4-BE49-F238E27FC236}">
-                <a16:creationId xmlns:a16="http://schemas.microsoft.com/office/drawing/2014/main" id="{5629199E-E83E-43AD-908F-A3321B6060C5}"/>
+                <a16:creationId xmlns:a16="http://schemas.microsoft.com/office/drawing/2014/main" id="{517448E4-AD11-4315-B2C8-662DAEF7E75C}"/>
               </a:ext>
             </a:extLst>
           </p:cNvPr>
@@ -15139,7 +15182,7 @@
           <p:cNvPr id="7" name="hybrid-cost">
             <a:extLst xmlns:a="http://schemas.openxmlformats.org/drawingml/2006/main">
               <a:ext uri="{FF2B5EF4-FFF2-40B4-BE49-F238E27FC236}">
-                <a16:creationId xmlns:a16="http://schemas.microsoft.com/office/drawing/2014/main" id="{539EA3E4-36C8-4456-A5DE-032F18200F52}"/>
+                <a16:creationId xmlns:a16="http://schemas.microsoft.com/office/drawing/2014/main" id="{E8E0DCAA-F07C-4EF9-A328-57C2058F4986}"/>
               </a:ext>
             </a:extLst>
           </p:cNvPr>
@@ -15225,7 +15268,7 @@
           <p:cNvPr id="7" name="eyebrow">
             <a:extLst xmlns:a="http://schemas.openxmlformats.org/drawingml/2006/main">
               <a:ext uri="{FF2B5EF4-FFF2-40B4-BE49-F238E27FC236}">
-                <a16:creationId xmlns:a16="http://schemas.microsoft.com/office/drawing/2014/main" id="{2FFD28F1-1259-4ACE-B9A0-8C44F41A0EAA}"/>
+                <a16:creationId xmlns:a16="http://schemas.microsoft.com/office/drawing/2014/main" id="{691AB8FC-8554-4341-88E7-0256862B885E}"/>
               </a:ext>
             </a:extLst>
           </p:cNvPr>
@@ -15282,7 +15325,7 @@
           <p:cNvPr id="2" name="slide-title">
             <a:extLst xmlns:a="http://schemas.openxmlformats.org/drawingml/2006/main">
               <a:ext uri="{FF2B5EF4-FFF2-40B4-BE49-F238E27FC236}">
-                <a16:creationId xmlns:a16="http://schemas.microsoft.com/office/drawing/2014/main" id="{C1F75619-EE56-4A33-A395-9DE114261475}"/>
+                <a16:creationId xmlns:a16="http://schemas.microsoft.com/office/drawing/2014/main" id="{32F4E7A6-A35E-4F39-9D60-53EA7D109477}"/>
               </a:ext>
             </a:extLst>
           </p:cNvPr>
@@ -15339,7 +15382,7 @@
           <p:cNvPr id="3" name="">
             <a:extLst xmlns:a="http://schemas.openxmlformats.org/drawingml/2006/main">
               <a:ext uri="{FF2B5EF4-FFF2-40B4-BE49-F238E27FC236}">
-                <a16:creationId xmlns:a16="http://schemas.microsoft.com/office/drawing/2014/main" id="{A3A52327-CB29-4409-A354-0F452CD8D82A}"/>
+                <a16:creationId xmlns:a16="http://schemas.microsoft.com/office/drawing/2014/main" id="{B91D412E-9B16-48FF-8FCC-2BDF755232B6}"/>
               </a:ext>
             </a:extLst>
           </p:cNvPr>
@@ -15371,7 +15414,7 @@
           <p:cNvPr id="4" name="slide-number">
             <a:extLst xmlns:a="http://schemas.openxmlformats.org/drawingml/2006/main">
               <a:ext uri="{FF2B5EF4-FFF2-40B4-BE49-F238E27FC236}">
-                <a16:creationId xmlns:a16="http://schemas.microsoft.com/office/drawing/2014/main" id="{AD28E81D-6ACD-47C0-AF95-832A472FF603}"/>
+                <a16:creationId xmlns:a16="http://schemas.microsoft.com/office/drawing/2014/main" id="{DE801732-5462-439F-8A1A-96AE969E312A}"/>
               </a:ext>
             </a:extLst>
           </p:cNvPr>
@@ -15428,7 +15471,7 @@
           <p:cNvPr id="5" name="model-argument">
             <a:extLst xmlns:a="http://schemas.openxmlformats.org/drawingml/2006/main">
               <a:ext uri="{FF2B5EF4-FFF2-40B4-BE49-F238E27FC236}">
-                <a16:creationId xmlns:a16="http://schemas.microsoft.com/office/drawing/2014/main" id="{9939C8F4-D30E-4B85-8F46-679EEE3DE8C7}"/>
+                <a16:creationId xmlns:a16="http://schemas.microsoft.com/office/drawing/2014/main" id="{0B3E4F64-ABEB-4FBF-8FCD-F69EDA94CD39}"/>
               </a:ext>
             </a:extLst>
           </p:cNvPr>
@@ -15559,7 +15602,7 @@
           <p:cNvPr id="6" name="vendor-caution">
             <a:extLst xmlns:a="http://schemas.openxmlformats.org/drawingml/2006/main">
               <a:ext uri="{FF2B5EF4-FFF2-40B4-BE49-F238E27FC236}">
-                <a16:creationId xmlns:a16="http://schemas.microsoft.com/office/drawing/2014/main" id="{44D52BBC-12BA-4DB7-BD97-D7798B7634AB}"/>
+                <a16:creationId xmlns:a16="http://schemas.microsoft.com/office/drawing/2014/main" id="{D9504C95-6AA8-42E6-BDA4-420EC3E9101E}"/>
               </a:ext>
             </a:extLst>
           </p:cNvPr>
@@ -15668,7 +15711,7 @@
           <p:cNvPr id="8" name="eyebrow">
             <a:extLst xmlns:a="http://schemas.openxmlformats.org/drawingml/2006/main">
               <a:ext uri="{FF2B5EF4-FFF2-40B4-BE49-F238E27FC236}">
-                <a16:creationId xmlns:a16="http://schemas.microsoft.com/office/drawing/2014/main" id="{B6910F37-D447-47D6-BEA2-167439754A7E}"/>
+                <a16:creationId xmlns:a16="http://schemas.microsoft.com/office/drawing/2014/main" id="{C9B8B59F-995B-4FEF-A5FC-F062D414BAF5}"/>
               </a:ext>
             </a:extLst>
           </p:cNvPr>
@@ -15725,7 +15768,7 @@
           <p:cNvPr id="2" name="slide-title">
             <a:extLst xmlns:a="http://schemas.openxmlformats.org/drawingml/2006/main">
               <a:ext uri="{FF2B5EF4-FFF2-40B4-BE49-F238E27FC236}">
-                <a16:creationId xmlns:a16="http://schemas.microsoft.com/office/drawing/2014/main" id="{5C236DE0-D761-43E8-9330-A1C972D8694B}"/>
+                <a16:creationId xmlns:a16="http://schemas.microsoft.com/office/drawing/2014/main" id="{058F86E7-6508-4606-8B08-D9DACC83DA74}"/>
               </a:ext>
             </a:extLst>
           </p:cNvPr>
@@ -15782,7 +15825,7 @@
           <p:cNvPr id="3" name="">
             <a:extLst xmlns:a="http://schemas.openxmlformats.org/drawingml/2006/main">
               <a:ext uri="{FF2B5EF4-FFF2-40B4-BE49-F238E27FC236}">
-                <a16:creationId xmlns:a16="http://schemas.microsoft.com/office/drawing/2014/main" id="{35EEDDE8-BE2C-45F5-AC1F-048A4803EC89}"/>
+                <a16:creationId xmlns:a16="http://schemas.microsoft.com/office/drawing/2014/main" id="{2915D0F9-6939-4164-BEAB-49FDE9B767D8}"/>
               </a:ext>
             </a:extLst>
           </p:cNvPr>
@@ -15814,7 +15857,7 @@
           <p:cNvPr id="4" name="slide-number">
             <a:extLst xmlns:a="http://schemas.openxmlformats.org/drawingml/2006/main">
               <a:ext uri="{FF2B5EF4-FFF2-40B4-BE49-F238E27FC236}">
-                <a16:creationId xmlns:a16="http://schemas.microsoft.com/office/drawing/2014/main" id="{986B4D13-B683-4CE6-891A-D82E8510F25E}"/>
+                <a16:creationId xmlns:a16="http://schemas.microsoft.com/office/drawing/2014/main" id="{0341CA66-8260-460A-8276-D1CF1FC7848B}"/>
               </a:ext>
             </a:extLst>
           </p:cNvPr>
@@ -15871,7 +15914,7 @@
           <p:cNvPr id="5" name="lab2-link">
             <a:extLst xmlns:a="http://schemas.openxmlformats.org/drawingml/2006/main">
               <a:ext uri="{FF2B5EF4-FFF2-40B4-BE49-F238E27FC236}">
-                <a16:creationId xmlns:a16="http://schemas.microsoft.com/office/drawing/2014/main" id="{BE96571C-ACB7-4673-8977-A720B4FCEB8B}"/>
+                <a16:creationId xmlns:a16="http://schemas.microsoft.com/office/drawing/2014/main" id="{932AAA4A-A853-4FEB-BAA6-150EA9CF6E81}"/>
               </a:ext>
             </a:extLst>
           </p:cNvPr>
@@ -15974,7 +16017,7 @@
           <p:cNvPr id="6" name="lab2-work">
             <a:extLst xmlns:a="http://schemas.openxmlformats.org/drawingml/2006/main">
               <a:ext uri="{FF2B5EF4-FFF2-40B4-BE49-F238E27FC236}">
-                <a16:creationId xmlns:a16="http://schemas.microsoft.com/office/drawing/2014/main" id="{28E5420F-A932-48A9-B474-54A96A150536}"/>
+                <a16:creationId xmlns:a16="http://schemas.microsoft.com/office/drawing/2014/main" id="{C17CC762-A237-451E-83C6-520B44EF655F}"/>
               </a:ext>
             </a:extLst>
           </p:cNvPr>
@@ -16077,7 +16120,7 @@
           <p:cNvPr id="7" name="lab2-submit">
             <a:extLst xmlns:a="http://schemas.openxmlformats.org/drawingml/2006/main">
               <a:ext uri="{FF2B5EF4-FFF2-40B4-BE49-F238E27FC236}">
-                <a16:creationId xmlns:a16="http://schemas.microsoft.com/office/drawing/2014/main" id="{6D098FCE-3666-46C3-9640-8AC9F55E859A}"/>
+                <a16:creationId xmlns:a16="http://schemas.microsoft.com/office/drawing/2014/main" id="{964F8612-007D-4D38-AB3F-A93C78173263}"/>
               </a:ext>
             </a:extLst>
           </p:cNvPr>
@@ -16186,7 +16229,7 @@
           <p:cNvPr id="7" name="eyebrow">
             <a:extLst xmlns:a="http://schemas.openxmlformats.org/drawingml/2006/main">
               <a:ext uri="{FF2B5EF4-FFF2-40B4-BE49-F238E27FC236}">
-                <a16:creationId xmlns:a16="http://schemas.microsoft.com/office/drawing/2014/main" id="{B49A1F18-C8D3-4145-85B2-E7D3CCDA2520}"/>
+                <a16:creationId xmlns:a16="http://schemas.microsoft.com/office/drawing/2014/main" id="{786F1DFE-B64F-4F43-A015-0EDF1A3C06CE}"/>
               </a:ext>
             </a:extLst>
           </p:cNvPr>
@@ -16243,7 +16286,7 @@
           <p:cNvPr id="2" name="slide-title">
             <a:extLst xmlns:a="http://schemas.openxmlformats.org/drawingml/2006/main">
               <a:ext uri="{FF2B5EF4-FFF2-40B4-BE49-F238E27FC236}">
-                <a16:creationId xmlns:a16="http://schemas.microsoft.com/office/drawing/2014/main" id="{547F49A2-B61B-45BF-804D-8DE7ADFEE18C}"/>
+                <a16:creationId xmlns:a16="http://schemas.microsoft.com/office/drawing/2014/main" id="{074ADACE-B2C1-4639-A4E8-E1DEE64F928D}"/>
               </a:ext>
             </a:extLst>
           </p:cNvPr>
@@ -16300,7 +16343,7 @@
           <p:cNvPr id="3" name="">
             <a:extLst xmlns:a="http://schemas.openxmlformats.org/drawingml/2006/main">
               <a:ext uri="{FF2B5EF4-FFF2-40B4-BE49-F238E27FC236}">
-                <a16:creationId xmlns:a16="http://schemas.microsoft.com/office/drawing/2014/main" id="{4B7F4A2C-5C4A-4C65-A2B8-31FE331C5803}"/>
+                <a16:creationId xmlns:a16="http://schemas.microsoft.com/office/drawing/2014/main" id="{572F72AF-1BE0-42B7-8BF8-CD31BEBA5276}"/>
               </a:ext>
             </a:extLst>
           </p:cNvPr>
@@ -16332,7 +16375,7 @@
           <p:cNvPr id="4" name="slide-number">
             <a:extLst xmlns:a="http://schemas.openxmlformats.org/drawingml/2006/main">
               <a:ext uri="{FF2B5EF4-FFF2-40B4-BE49-F238E27FC236}">
-                <a16:creationId xmlns:a16="http://schemas.microsoft.com/office/drawing/2014/main" id="{1BA28E9C-125F-4EA0-9A84-F0BB9022E3B3}"/>
+                <a16:creationId xmlns:a16="http://schemas.microsoft.com/office/drawing/2014/main" id="{88567E21-1FD5-42CE-83B7-E9A2D5218768}"/>
               </a:ext>
             </a:extLst>
           </p:cNvPr>
@@ -16389,7 +16432,7 @@
           <p:cNvPr id="5" name="career-example">
             <a:extLst xmlns:a="http://schemas.openxmlformats.org/drawingml/2006/main">
               <a:ext uri="{FF2B5EF4-FFF2-40B4-BE49-F238E27FC236}">
-                <a16:creationId xmlns:a16="http://schemas.microsoft.com/office/drawing/2014/main" id="{3250EBFD-B800-448B-9689-C0E304B2219D}"/>
+                <a16:creationId xmlns:a16="http://schemas.microsoft.com/office/drawing/2014/main" id="{7A3487FE-C4C1-405B-A9FC-738BD3607BB8}"/>
               </a:ext>
             </a:extLst>
           </p:cNvPr>
@@ -16446,7 +16489,7 @@
           <p:cNvPr id="6" name="career-scope">
             <a:extLst xmlns:a="http://schemas.openxmlformats.org/drawingml/2006/main">
               <a:ext uri="{FF2B5EF4-FFF2-40B4-BE49-F238E27FC236}">
-                <a16:creationId xmlns:a16="http://schemas.microsoft.com/office/drawing/2014/main" id="{67D2068A-DC28-46DE-86CB-1758DCCFF912}"/>
+                <a16:creationId xmlns:a16="http://schemas.microsoft.com/office/drawing/2014/main" id="{F4A840D1-282B-4CBA-8BB6-1622EF3B7485}"/>
               </a:ext>
             </a:extLst>
           </p:cNvPr>
@@ -16532,563 +16575,563 @@
 </file>
 
 <file path=ppt/slides/slide3.xml><?xml version="1.0" encoding="utf-8"?>
-<p:sld xmlns:p="http://schemas.openxmlformats.org/presentationml/2006/main">
-  <p:cSld>
-    <p:bg>
-      <p:bgPr>
-        <a:solidFill xmlns:a="http://schemas.openxmlformats.org/drawingml/2006/main">
-          <a:srgbClr val="FCFCFA"/>
-        </a:solidFill>
-      </p:bgPr>
-    </p:bg>
-    <p:spTree>
-      <p:nvGrpSpPr>
-        <p:cNvPr id="1" name=""/>
-        <p:cNvGrpSpPr/>
-        <p:nvPr/>
-      </p:nvGrpSpPr>
-      <p:grpSpPr>
-        <a:xfrm xmlns:a="http://schemas.openxmlformats.org/drawingml/2006/main"/>
-      </p:grpSpPr>
-      <p:pic>
-        <p:nvPicPr>
-          <p:cNvPr id="21" name=""/>
-          <p:cNvPicPr>
-            <a:picLocks xmlns:a="http://schemas.openxmlformats.org/drawingml/2006/main" noChangeAspect="1"/>
-          </p:cNvPicPr>
-          <p:nvPr/>
-        </p:nvPicPr>
-        <p:blipFill>
-          <a:blip xmlns:r="http://schemas.openxmlformats.org/officeDocument/2006/relationships" xmlns:a="http://schemas.openxmlformats.org/drawingml/2006/main" r:embed="Rbcc5c351e1534d49"/>
-          <a:srcRect xmlns:a="http://schemas.openxmlformats.org/drawingml/2006/main" l="0" t="9500" r="0" b="9500"/>
-          <a:stretch xmlns:a="http://schemas.openxmlformats.org/drawingml/2006/main">
-            <a:fillRect l="0" t="0" r="0" b="0"/>
-          </a:stretch>
-        </p:blipFill>
-        <p:spPr>
-          <a:xfrm xmlns:a="http://schemas.openxmlformats.org/drawingml/2006/main">
-            <a:off x="695325" y="1743075"/>
-            <a:ext cx="6705600" cy="4143375"/>
-          </a:xfrm>
-          <a:prstGeom xmlns:a="http://schemas.openxmlformats.org/drawingml/2006/main" prst="roundRect">
-            <a:avLst>
-              <a:gd name="adj" fmla="val 3000"/>
-            </a:avLst>
-          </a:prstGeom>
-        </p:spPr>
-      </p:pic>
-      <p:sp>
-        <p:nvSpPr>
-          <p:cNvPr id="14" name="eyebrow">
-            <a:extLst xmlns:a="http://schemas.openxmlformats.org/drawingml/2006/main">
-              <a:ext uri="{FF2B5EF4-FFF2-40B4-BE49-F238E27FC236}">
-                <a16:creationId xmlns:a16="http://schemas.microsoft.com/office/drawing/2014/main" id="{F0FD33A4-1F14-440A-9860-05B940CDDEBA}"/>
-              </a:ext>
-            </a:extLst>
-          </p:cNvPr>
-          <p:cNvSpPr>
-            <a:spLocks xmlns:a="http://schemas.openxmlformats.org/drawingml/2006/main" noGrp="1"/>
-          </p:cNvSpPr>
-          <p:nvPr/>
-        </p:nvSpPr>
-        <p:spPr>
-          <a:xfrm xmlns:a="http://schemas.openxmlformats.org/drawingml/2006/main">
-            <a:off x="609600" y="295275"/>
-            <a:ext cx="5715000" cy="228600"/>
-          </a:xfrm>
-          <a:prstGeom xmlns:a="http://schemas.openxmlformats.org/drawingml/2006/main" prst="rect">
-            <a:avLst/>
-          </a:prstGeom>
-          <a:noFill xmlns:a="http://schemas.openxmlformats.org/drawingml/2006/main"/>
-          <a:ln xmlns:a="http://schemas.openxmlformats.org/drawingml/2006/main" w="0">
-            <a:noFill/>
-          </a:ln>
-        </p:spPr>
-        <p:txBody>
-          <a:bodyPr xmlns:a="http://schemas.openxmlformats.org/drawingml/2006/main" wrap="square" lIns="0" tIns="0" rIns="0" bIns="0" anchor="t">
-            <a:noAutofit/>
-          </a:bodyPr>
-          <a:lstStyle xmlns:a="http://schemas.openxmlformats.org/drawingml/2006/main"/>
-          <a:p xmlns:a="http://schemas.openxmlformats.org/drawingml/2006/main">
-            <a:pPr>
-              <a:defRPr sz="1050" b="1">
-                <a:solidFill>
-                  <a:srgbClr val="214AE8"/>
-                </a:solidFill>
-                <a:latin typeface="Helvetica Neue"/>
-                <a:ea typeface="Helvetica Neue"/>
-                <a:cs typeface="Helvetica Neue"/>
-              </a:defRPr>
-            </a:pPr>
-            <a:r>
-              <a:rPr sz="1050" b="1">
-                <a:solidFill>
-                  <a:srgbClr val="214AE8"/>
-                </a:solidFill>
-                <a:latin typeface="Helvetica Neue"/>
-                <a:ea typeface="Helvetica Neue"/>
-                <a:cs typeface="Helvetica Neue"/>
-              </a:rPr>
-              <a:t>WEEK 10  /  CST4714</a:t>
-            </a:r>
-          </a:p>
-        </p:txBody>
-      </p:sp>
-      <p:sp>
-        <p:nvSpPr>
-          <p:cNvPr id="15" name="slide-title">
-            <a:extLst xmlns:a="http://schemas.openxmlformats.org/drawingml/2006/main">
-              <a:ext uri="{FF2B5EF4-FFF2-40B4-BE49-F238E27FC236}">
-                <a16:creationId xmlns:a16="http://schemas.microsoft.com/office/drawing/2014/main" id="{2ABB2F22-169D-4F8F-B769-877B341033B8}"/>
-              </a:ext>
-            </a:extLst>
-          </p:cNvPr>
-          <p:cNvSpPr>
-            <a:spLocks xmlns:a="http://schemas.openxmlformats.org/drawingml/2006/main" noGrp="1"/>
-          </p:cNvSpPr>
-          <p:nvPr/>
-        </p:nvSpPr>
-        <p:spPr>
-          <a:xfrm xmlns:a="http://schemas.openxmlformats.org/drawingml/2006/main">
-            <a:off x="609600" y="619125"/>
-            <a:ext cx="10972800" cy="628650"/>
-          </a:xfrm>
-          <a:prstGeom xmlns:a="http://schemas.openxmlformats.org/drawingml/2006/main" prst="rect">
-            <a:avLst/>
-          </a:prstGeom>
-          <a:noFill xmlns:a="http://schemas.openxmlformats.org/drawingml/2006/main"/>
-          <a:ln xmlns:a="http://schemas.openxmlformats.org/drawingml/2006/main" w="0">
-            <a:noFill/>
-          </a:ln>
-        </p:spPr>
-        <p:txBody>
-          <a:bodyPr xmlns:a="http://schemas.openxmlformats.org/drawingml/2006/main" wrap="square" lIns="0" tIns="0" rIns="0" bIns="0" anchor="t">
-            <a:noAutofit/>
-          </a:bodyPr>
-          <a:lstStyle xmlns:a="http://schemas.openxmlformats.org/drawingml/2006/main"/>
-          <a:p xmlns:a="http://schemas.openxmlformats.org/drawingml/2006/main">
-            <a:pPr>
-              <a:defRPr sz="2775" b="1">
-                <a:solidFill>
-                  <a:srgbClr val="111827"/>
-                </a:solidFill>
-                <a:latin typeface="Helvetica Neue"/>
-                <a:ea typeface="Helvetica Neue"/>
-                <a:cs typeface="Helvetica Neue"/>
-              </a:defRPr>
-            </a:pPr>
-            <a:r>
-              <a:rPr sz="2775" b="1">
-                <a:solidFill>
-                  <a:srgbClr val="111827"/>
-                </a:solidFill>
-                <a:latin typeface="Helvetica Neue"/>
-                <a:ea typeface="Helvetica Neue"/>
-                <a:cs typeface="Helvetica Neue"/>
-              </a:rPr>
-              <a:t>Atlas deployment and database connection</a:t>
-            </a:r>
-          </a:p>
-        </p:txBody>
-      </p:sp>
-      <p:sp>
-        <p:nvSpPr>
-          <p:cNvPr id="16" name="">
-            <a:extLst xmlns:a="http://schemas.openxmlformats.org/drawingml/2006/main">
-              <a:ext uri="{FF2B5EF4-FFF2-40B4-BE49-F238E27FC236}">
-                <a16:creationId xmlns:a16="http://schemas.microsoft.com/office/drawing/2014/main" id="{B71E442A-53EA-4FE5-AC4B-ABC2DDB1492D}"/>
-              </a:ext>
-            </a:extLst>
-          </p:cNvPr>
-          <p:cNvSpPr>
-            <a:spLocks xmlns:a="http://schemas.openxmlformats.org/drawingml/2006/main" noGrp="1"/>
-          </p:cNvSpPr>
-          <p:nvPr/>
-        </p:nvSpPr>
-        <p:spPr>
-          <a:xfrm xmlns:a="http://schemas.openxmlformats.org/drawingml/2006/main">
-            <a:off x="609600" y="1295400"/>
-            <a:ext cx="10972800" cy="9525"/>
-          </a:xfrm>
-          <a:prstGeom xmlns:a="http://schemas.openxmlformats.org/drawingml/2006/main" prst="rect">
-            <a:avLst/>
-          </a:prstGeom>
-          <a:solidFill xmlns:a="http://schemas.openxmlformats.org/drawingml/2006/main">
-            <a:srgbClr val="CBD5E1"/>
-          </a:solidFill>
-          <a:ln xmlns:a="http://schemas.openxmlformats.org/drawingml/2006/main" w="0">
-            <a:solidFill>
-              <a:srgbClr val="CBD5E1"/>
-            </a:solidFill>
-          </a:ln>
-        </p:spPr>
-      </p:sp>
-      <p:sp>
-        <p:nvSpPr>
-          <p:cNvPr id="17" name="slide-number">
-            <a:extLst xmlns:a="http://schemas.openxmlformats.org/drawingml/2006/main">
-              <a:ext uri="{FF2B5EF4-FFF2-40B4-BE49-F238E27FC236}">
-                <a16:creationId xmlns:a16="http://schemas.microsoft.com/office/drawing/2014/main" id="{B927ADD4-C76A-4B0E-BCA1-D24C10D2E10E}"/>
-              </a:ext>
-            </a:extLst>
-          </p:cNvPr>
-          <p:cNvSpPr>
-            <a:spLocks xmlns:a="http://schemas.openxmlformats.org/drawingml/2006/main" noGrp="1"/>
-          </p:cNvSpPr>
-          <p:nvPr/>
-        </p:nvSpPr>
-        <p:spPr>
-          <a:xfrm xmlns:a="http://schemas.openxmlformats.org/drawingml/2006/main">
-            <a:off x="11125200" y="6467475"/>
-            <a:ext cx="457200" cy="190500"/>
-          </a:xfrm>
-          <a:prstGeom xmlns:a="http://schemas.openxmlformats.org/drawingml/2006/main" prst="rect">
-            <a:avLst/>
-          </a:prstGeom>
-          <a:noFill xmlns:a="http://schemas.openxmlformats.org/drawingml/2006/main"/>
-          <a:ln xmlns:a="http://schemas.openxmlformats.org/drawingml/2006/main" w="0">
-            <a:noFill/>
-          </a:ln>
-        </p:spPr>
-        <p:txBody>
-          <a:bodyPr xmlns:a="http://schemas.openxmlformats.org/drawingml/2006/main" wrap="square" lIns="0" tIns="0" rIns="0" bIns="0" anchor="t">
-            <a:noAutofit/>
-          </a:bodyPr>
-          <a:lstStyle xmlns:a="http://schemas.openxmlformats.org/drawingml/2006/main"/>
-          <a:p xmlns:a="http://schemas.openxmlformats.org/drawingml/2006/main">
-            <a:pPr>
-              <a:defRPr sz="900" b="0">
-                <a:solidFill>
-                  <a:srgbClr val="64748B"/>
-                </a:solidFill>
-                <a:latin typeface="Helvetica Neue"/>
-                <a:ea typeface="Helvetica Neue"/>
-                <a:cs typeface="Helvetica Neue"/>
-              </a:defRPr>
-            </a:pPr>
-            <a:r>
-              <a:rPr sz="900" b="0">
-                <a:solidFill>
-                  <a:srgbClr val="64748B"/>
-                </a:solidFill>
-                <a:latin typeface="Helvetica Neue"/>
-                <a:ea typeface="Helvetica Neue"/>
-                <a:cs typeface="Helvetica Neue"/>
-              </a:rPr>
-              <a:t>03</a:t>
-            </a:r>
-          </a:p>
-        </p:txBody>
-      </p:sp>
-      <p:sp>
-        <p:nvSpPr>
-          <p:cNvPr id="18" name="layer-summary">
-            <a:extLst xmlns:a="http://schemas.openxmlformats.org/drawingml/2006/main">
-              <a:ext uri="{FF2B5EF4-FFF2-40B4-BE49-F238E27FC236}">
-                <a16:creationId xmlns:a16="http://schemas.microsoft.com/office/drawing/2014/main" id="{2118C039-1299-4FD6-95E3-9656D9A0E2F5}"/>
-              </a:ext>
-            </a:extLst>
-          </p:cNvPr>
-          <p:cNvSpPr>
-            <a:spLocks xmlns:a="http://schemas.openxmlformats.org/drawingml/2006/main" noGrp="1"/>
-          </p:cNvSpPr>
-          <p:nvPr/>
-        </p:nvSpPr>
-        <p:spPr>
-          <a:xfrm xmlns:a="http://schemas.openxmlformats.org/drawingml/2006/main">
-            <a:off x="7886700" y="1885950"/>
-            <a:ext cx="3638550" cy="2800350"/>
-          </a:xfrm>
-          <a:prstGeom xmlns:a="http://schemas.openxmlformats.org/drawingml/2006/main" prst="rect">
-            <a:avLst/>
-          </a:prstGeom>
-          <a:noFill xmlns:a="http://schemas.openxmlformats.org/drawingml/2006/main"/>
-          <a:ln xmlns:a="http://schemas.openxmlformats.org/drawingml/2006/main" w="0">
-            <a:noFill/>
-          </a:ln>
-        </p:spPr>
-        <p:txBody>
-          <a:bodyPr xmlns:a="http://schemas.openxmlformats.org/drawingml/2006/main" wrap="square" lIns="0" tIns="0" rIns="0" bIns="0" anchor="t">
-            <a:noAutofit/>
-          </a:bodyPr>
-          <a:lstStyle xmlns:a="http://schemas.openxmlformats.org/drawingml/2006/main"/>
-          <a:p xmlns:a="http://schemas.openxmlformats.org/drawingml/2006/main">
-            <a:pPr>
-              <a:defRPr sz="2025" b="0">
-                <a:solidFill>
-                  <a:srgbClr val="111827"/>
-                </a:solidFill>
-                <a:latin typeface="Helvetica Neue"/>
-                <a:ea typeface="Helvetica Neue"/>
-                <a:cs typeface="Helvetica Neue"/>
-              </a:defRPr>
-            </a:pPr>
-            <a:r>
-              <a:rPr sz="2025" b="0">
-                <a:solidFill>
-                  <a:srgbClr val="111827"/>
-                </a:solidFill>
-                <a:latin typeface="Helvetica Neue"/>
-                <a:ea typeface="Helvetica Neue"/>
-                <a:cs typeface="Helvetica Neue"/>
-              </a:rPr>
-              <a:t>Project: cloud administration</a:t>
-            </a:r>
-          </a:p>
-          <a:p xmlns:a="http://schemas.openxmlformats.org/drawingml/2006/main">
-            <a:r>
-              <a:t/>
-            </a:r>
-          </a:p>
-          <a:p xmlns:a="http://schemas.openxmlformats.org/drawingml/2006/main">
-            <a:pPr>
-              <a:defRPr sz="2025" b="0">
-                <a:solidFill>
-                  <a:srgbClr val="111827"/>
-                </a:solidFill>
-                <a:latin typeface="Helvetica Neue"/>
-                <a:ea typeface="Helvetica Neue"/>
-                <a:cs typeface="Helvetica Neue"/>
-              </a:defRPr>
-            </a:pPr>
-            <a:r>
-              <a:rPr sz="2025" b="0">
-                <a:solidFill>
-                  <a:srgbClr val="111827"/>
-                </a:solidFill>
-                <a:latin typeface="Helvetica Neue"/>
-                <a:ea typeface="Helvetica Neue"/>
-                <a:cs typeface="Helvetica Neue"/>
-              </a:rPr>
-              <a:t>Cluster: database service</a:t>
-            </a:r>
-          </a:p>
-          <a:p xmlns:a="http://schemas.openxmlformats.org/drawingml/2006/main">
-            <a:r>
-              <a:t/>
-            </a:r>
-          </a:p>
-          <a:p xmlns:a="http://schemas.openxmlformats.org/drawingml/2006/main">
-            <a:pPr>
-              <a:defRPr sz="2025" b="0">
-                <a:solidFill>
-                  <a:srgbClr val="111827"/>
-                </a:solidFill>
-                <a:latin typeface="Helvetica Neue"/>
-                <a:ea typeface="Helvetica Neue"/>
-                <a:cs typeface="Helvetica Neue"/>
-              </a:defRPr>
-            </a:pPr>
-            <a:r>
-              <a:rPr sz="2025" b="0">
-                <a:solidFill>
-                  <a:srgbClr val="111827"/>
-                </a:solidFill>
-                <a:latin typeface="Helvetica Neue"/>
-                <a:ea typeface="Helvetica Neue"/>
-                <a:cs typeface="Helvetica Neue"/>
-              </a:rPr>
-              <a:t>Database: collections</a:t>
-            </a:r>
-          </a:p>
-          <a:p xmlns:a="http://schemas.openxmlformats.org/drawingml/2006/main">
-            <a:r>
-              <a:t/>
-            </a:r>
-          </a:p>
-          <a:p xmlns:a="http://schemas.openxmlformats.org/drawingml/2006/main">
-            <a:pPr>
-              <a:defRPr sz="2025" b="0">
-                <a:solidFill>
-                  <a:srgbClr val="111827"/>
-                </a:solidFill>
-                <a:latin typeface="Helvetica Neue"/>
-                <a:ea typeface="Helvetica Neue"/>
-                <a:cs typeface="Helvetica Neue"/>
-              </a:defRPr>
-            </a:pPr>
-            <a:r>
-              <a:rPr sz="2025" b="0">
-                <a:solidFill>
-                  <a:srgbClr val="111827"/>
-                </a:solidFill>
-                <a:latin typeface="Helvetica Neue"/>
-                <a:ea typeface="Helvetica Neue"/>
-                <a:cs typeface="Helvetica Neue"/>
-              </a:rPr>
-              <a:t>Collection: documents</a:t>
-            </a:r>
-          </a:p>
-        </p:txBody>
-      </p:sp>
-      <p:sp>
-        <p:nvSpPr>
-          <p:cNvPr id="19" name="image-meaning">
-            <a:extLst xmlns:a="http://schemas.openxmlformats.org/drawingml/2006/main">
-              <a:ext uri="{FF2B5EF4-FFF2-40B4-BE49-F238E27FC236}">
-                <a16:creationId xmlns:a16="http://schemas.microsoft.com/office/drawing/2014/main" id="{A5DACF45-1AA3-4B3B-87E9-96C8DF8CB970}"/>
-              </a:ext>
-            </a:extLst>
-          </p:cNvPr>
-          <p:cNvSpPr>
-            <a:spLocks xmlns:a="http://schemas.openxmlformats.org/drawingml/2006/main" noGrp="1"/>
-          </p:cNvSpPr>
-          <p:nvPr/>
-        </p:nvSpPr>
-        <p:spPr>
-          <a:xfrm xmlns:a="http://schemas.openxmlformats.org/drawingml/2006/main">
-            <a:off x="7886700" y="5114925"/>
-            <a:ext cx="3638550" cy="1095375"/>
-          </a:xfrm>
-          <a:prstGeom xmlns:a="http://schemas.openxmlformats.org/drawingml/2006/main" prst="rect">
-            <a:avLst/>
-          </a:prstGeom>
-          <a:noFill xmlns:a="http://schemas.openxmlformats.org/drawingml/2006/main"/>
-          <a:ln xmlns:a="http://schemas.openxmlformats.org/drawingml/2006/main" w="0">
-            <a:noFill/>
-          </a:ln>
-        </p:spPr>
-        <p:txBody>
-          <a:bodyPr xmlns:a="http://schemas.openxmlformats.org/drawingml/2006/main" wrap="square" lIns="0" tIns="0" rIns="0" bIns="0" anchor="t">
-            <a:noAutofit/>
-          </a:bodyPr>
-          <a:lstStyle xmlns:a="http://schemas.openxmlformats.org/drawingml/2006/main"/>
-          <a:p xmlns:a="http://schemas.openxmlformats.org/drawingml/2006/main">
-            <a:pPr>
-              <a:defRPr sz="1875" b="0">
-                <a:solidFill>
-                  <a:srgbClr val="111827"/>
-                </a:solidFill>
-                <a:latin typeface="Helvetica Neue"/>
-                <a:ea typeface="Helvetica Neue"/>
-                <a:cs typeface="Helvetica Neue"/>
-              </a:defRPr>
-            </a:pPr>
-            <a:r>
-              <a:rPr sz="1875" b="0">
-                <a:solidFill>
-                  <a:srgbClr val="111827"/>
-                </a:solidFill>
-                <a:latin typeface="Helvetica Neue"/>
-                <a:ea typeface="Helvetica Neue"/>
-                <a:cs typeface="Helvetica Neue"/>
-              </a:rPr>
-              <a:t>This capture shows a deployment</a:t>
-            </a:r>
-          </a:p>
-          <a:p xmlns:a="http://schemas.openxmlformats.org/drawingml/2006/main">
-            <a:pPr>
-              <a:defRPr sz="1875" b="0">
-                <a:solidFill>
-                  <a:srgbClr val="111827"/>
-                </a:solidFill>
-                <a:latin typeface="Helvetica Neue"/>
-                <a:ea typeface="Helvetica Neue"/>
-                <a:cs typeface="Helvetica Neue"/>
-              </a:defRPr>
-            </a:pPr>
-            <a:r>
-              <a:rPr sz="1875" b="0">
-                <a:solidFill>
-                  <a:srgbClr val="111827"/>
-                </a:solidFill>
-                <a:latin typeface="Helvetica Neue"/>
-                <a:ea typeface="Helvetica Neue"/>
-                <a:cs typeface="Helvetica Neue"/>
-              </a:rPr>
-              <a:t>while Data Explorer requests</a:t>
-            </a:r>
-          </a:p>
-          <a:p xmlns:a="http://schemas.openxmlformats.org/drawingml/2006/main">
-            <a:pPr>
-              <a:defRPr sz="1875" b="0">
-                <a:solidFill>
-                  <a:srgbClr val="111827"/>
-                </a:solidFill>
-                <a:latin typeface="Helvetica Neue"/>
-                <a:ea typeface="Helvetica Neue"/>
-                <a:cs typeface="Helvetica Neue"/>
-              </a:defRPr>
-            </a:pPr>
-            <a:r>
-              <a:rPr sz="1875" b="0">
-                <a:solidFill>
-                  <a:srgbClr val="111827"/>
-                </a:solidFill>
-                <a:latin typeface="Helvetica Neue"/>
-                <a:ea typeface="Helvetica Neue"/>
-                <a:cs typeface="Helvetica Neue"/>
-              </a:rPr>
-              <a:t>a connection.</a:t>
-            </a:r>
-          </a:p>
-        </p:txBody>
-      </p:sp>
-      <p:sp>
-        <p:nvSpPr>
-          <p:cNvPr id="20" name="capture-caption">
-            <a:extLst xmlns:a="http://schemas.openxmlformats.org/drawingml/2006/main">
-              <a:ext uri="{FF2B5EF4-FFF2-40B4-BE49-F238E27FC236}">
-                <a16:creationId xmlns:a16="http://schemas.microsoft.com/office/drawing/2014/main" id="{A0EA7FFB-042E-4F6B-908C-6480893E94F2}"/>
-              </a:ext>
-            </a:extLst>
-          </p:cNvPr>
-          <p:cNvSpPr>
-            <a:spLocks xmlns:a="http://schemas.openxmlformats.org/drawingml/2006/main" noGrp="1"/>
-          </p:cNvSpPr>
-          <p:nvPr/>
-        </p:nvSpPr>
-        <p:spPr>
-          <a:xfrm xmlns:a="http://schemas.openxmlformats.org/drawingml/2006/main">
-            <a:off x="723900" y="6200775"/>
-            <a:ext cx="10668000" cy="285750"/>
-          </a:xfrm>
-          <a:prstGeom xmlns:a="http://schemas.openxmlformats.org/drawingml/2006/main" prst="rect">
-            <a:avLst/>
-          </a:prstGeom>
-          <a:noFill xmlns:a="http://schemas.openxmlformats.org/drawingml/2006/main"/>
-          <a:ln xmlns:a="http://schemas.openxmlformats.org/drawingml/2006/main" w="0">
-            <a:noFill/>
-          </a:ln>
-        </p:spPr>
-        <p:txBody>
-          <a:bodyPr xmlns:a="http://schemas.openxmlformats.org/drawingml/2006/main" wrap="square" lIns="0" tIns="0" rIns="0" bIns="0" anchor="t">
-            <a:noAutofit/>
-          </a:bodyPr>
-          <a:lstStyle xmlns:a="http://schemas.openxmlformats.org/drawingml/2006/main"/>
-          <a:p xmlns:a="http://schemas.openxmlformats.org/drawingml/2006/main">
-            <a:pPr>
-              <a:defRPr sz="1575" b="0">
-                <a:solidFill>
-                  <a:srgbClr val="111827"/>
-                </a:solidFill>
-                <a:latin typeface="Helvetica Neue"/>
-                <a:ea typeface="Helvetica Neue"/>
-                <a:cs typeface="Helvetica Neue"/>
-              </a:defRPr>
-            </a:pPr>
-            <a:r>
-              <a:rPr sz="1575" b="0">
-                <a:solidFill>
-                  <a:srgbClr val="111827"/>
-                </a:solidFill>
-                <a:latin typeface="Helvetica Neue"/>
-                <a:ea typeface="Helvetica Neue"/>
-                <a:cs typeface="Helvetica Neue"/>
-              </a:rPr>
-              <a:t>Interface captured August 25, 2026. Names redacted. This is not a successful query result.</a:t>
-            </a:r>
-          </a:p>
-        </p:txBody>
-      </p:sp>
-    </p:spTree>
-    <p:extLst>
-      <p:ext uri="{BB962C8B-B14F-4D97-AF65-F5344CB8AC3E}">
-        <p14:creationId xmlns:p14="http://schemas.microsoft.com/office/powerpoint/2010/main" val="1655995919"/>
-      </p:ext>
-    </p:extLst>
-  </p:cSld>
-</p:sld>
+<ns0:sld xmlns:ns0="http://schemas.openxmlformats.org/presentationml/2006/main" xmlns:ns1="http://schemas.openxmlformats.org/drawingml/2006/main" xmlns:ns2="http://schemas.openxmlformats.org/officeDocument/2006/relationships" xmlns:ns3="http://schemas.microsoft.com/office/drawing/2014/main" xmlns:ns4="http://schemas.microsoft.com/office/powerpoint/2010/main">
+  <ns0:cSld>
+    <ns0:bg>
+      <ns0:bgPr>
+        <ns1:solidFill>
+          <ns1:srgbClr val="FCFCFA"/>
+        </ns1:solidFill>
+      </ns0:bgPr>
+    </ns0:bg>
+    <ns0:spTree>
+      <ns0:nvGrpSpPr>
+        <ns0:cNvPr id="1" name=""/>
+        <ns0:cNvGrpSpPr/>
+        <ns0:nvPr/>
+      </ns0:nvGrpSpPr>
+      <ns0:grpSpPr>
+        <ns1:xfrm/>
+      </ns0:grpSpPr>
+      <ns0:pic>
+        <ns0:nvPicPr>
+          <ns0:cNvPr id="21" name="" descr="Atlas Data Explorer shows a deployment in the left navigation while the main workspace asks the user to connect. Deployment readiness, database authentication, and network access are separate connection prerequisites. Organization, project, and deployment names are redacted."/>
+          <ns0:cNvPicPr>
+            <ns1:picLocks noChangeAspect="1"/>
+          </ns0:cNvPicPr>
+          <ns0:nvPr/>
+        </ns0:nvPicPr>
+        <ns0:blipFill>
+          <ns1:blip ns2:embed="Rfe200d7b91274e56"/>
+          <ns1:srcRect l="0" t="9500" r="0" b="9500"/>
+          <ns1:stretch>
+            <ns1:fillRect l="0" t="0" r="0" b="0"/>
+          </ns1:stretch>
+        </ns0:blipFill>
+        <ns0:spPr>
+          <ns1:xfrm>
+            <ns1:off x="695325" y="1743075"/>
+            <ns1:ext cx="6705600" cy="4143375"/>
+          </ns1:xfrm>
+          <ns1:prstGeom prst="roundRect">
+            <ns1:avLst>
+              <ns1:gd name="adj" fmla="val 3000"/>
+            </ns1:avLst>
+          </ns1:prstGeom>
+        </ns0:spPr>
+      </ns0:pic>
+      <ns0:sp>
+        <ns0:nvSpPr>
+          <ns0:cNvPr id="14" name="eyebrow">
+            <ns1:extLst>
+              <ns1:ext uri="{FF2B5EF4-FFF2-40B4-BE49-F238E27FC236}">
+                <ns3:creationId id="{FBF75203-39B6-48C8-A0B5-6BCA1A8476A5}"/>
+              </ns1:ext>
+            </ns1:extLst>
+          </ns0:cNvPr>
+          <ns0:cNvSpPr>
+            <ns1:spLocks noGrp="1"/>
+          </ns0:cNvSpPr>
+          <ns0:nvPr/>
+        </ns0:nvSpPr>
+        <ns0:spPr>
+          <ns1:xfrm>
+            <ns1:off x="609600" y="295275"/>
+            <ns1:ext cx="5715000" cy="228600"/>
+          </ns1:xfrm>
+          <ns1:prstGeom prst="rect">
+            <ns1:avLst/>
+          </ns1:prstGeom>
+          <ns1:noFill/>
+          <ns1:ln w="0">
+            <ns1:noFill/>
+          </ns1:ln>
+        </ns0:spPr>
+        <ns0:txBody>
+          <ns1:bodyPr wrap="square" lIns="0" tIns="0" rIns="0" bIns="0" anchor="t">
+            <ns1:noAutofit/>
+          </ns1:bodyPr>
+          <ns1:lstStyle/>
+          <ns1:p>
+            <ns1:pPr>
+              <ns1:defRPr sz="1050" b="1">
+                <ns1:solidFill>
+                  <ns1:srgbClr val="214AE8"/>
+                </ns1:solidFill>
+                <ns1:latin typeface="Helvetica Neue"/>
+                <ns1:ea typeface="Helvetica Neue"/>
+                <ns1:cs typeface="Helvetica Neue"/>
+              </ns1:defRPr>
+            </ns1:pPr>
+            <ns1:r>
+              <ns1:rPr sz="1050" b="1">
+                <ns1:solidFill>
+                  <ns1:srgbClr val="214AE8"/>
+                </ns1:solidFill>
+                <ns1:latin typeface="Helvetica Neue"/>
+                <ns1:ea typeface="Helvetica Neue"/>
+                <ns1:cs typeface="Helvetica Neue"/>
+              </ns1:rPr>
+              <ns1:t>WEEK 10  /  CST4714</ns1:t>
+            </ns1:r>
+          </ns1:p>
+        </ns0:txBody>
+      </ns0:sp>
+      <ns0:sp>
+        <ns0:nvSpPr>
+          <ns0:cNvPr id="15" name="slide-title">
+            <ns1:extLst>
+              <ns1:ext uri="{FF2B5EF4-FFF2-40B4-BE49-F238E27FC236}">
+                <ns3:creationId id="{F3AA08DB-BF49-43D3-9CCC-F021C1BD02F4}"/>
+              </ns1:ext>
+            </ns1:extLst>
+          </ns0:cNvPr>
+          <ns0:cNvSpPr>
+            <ns1:spLocks noGrp="1"/>
+          </ns0:cNvSpPr>
+          <ns0:nvPr/>
+        </ns0:nvSpPr>
+        <ns0:spPr>
+          <ns1:xfrm>
+            <ns1:off x="609600" y="619125"/>
+            <ns1:ext cx="10972800" cy="628650"/>
+          </ns1:xfrm>
+          <ns1:prstGeom prst="rect">
+            <ns1:avLst/>
+          </ns1:prstGeom>
+          <ns1:noFill/>
+          <ns1:ln w="0">
+            <ns1:noFill/>
+          </ns1:ln>
+        </ns0:spPr>
+        <ns0:txBody>
+          <ns1:bodyPr wrap="square" lIns="0" tIns="0" rIns="0" bIns="0" anchor="t">
+            <ns1:noAutofit/>
+          </ns1:bodyPr>
+          <ns1:lstStyle/>
+          <ns1:p>
+            <ns1:pPr>
+              <ns1:defRPr sz="2775" b="1">
+                <ns1:solidFill>
+                  <ns1:srgbClr val="111827"/>
+                </ns1:solidFill>
+                <ns1:latin typeface="Helvetica Neue"/>
+                <ns1:ea typeface="Helvetica Neue"/>
+                <ns1:cs typeface="Helvetica Neue"/>
+              </ns1:defRPr>
+            </ns1:pPr>
+            <ns1:r>
+              <ns1:rPr sz="2775" b="1">
+                <ns1:solidFill>
+                  <ns1:srgbClr val="111827"/>
+                </ns1:solidFill>
+                <ns1:latin typeface="Helvetica Neue"/>
+                <ns1:ea typeface="Helvetica Neue"/>
+                <ns1:cs typeface="Helvetica Neue"/>
+              </ns1:rPr>
+              <ns1:t>Atlas deployment and database connection</ns1:t>
+            </ns1:r>
+          </ns1:p>
+        </ns0:txBody>
+      </ns0:sp>
+      <ns0:sp>
+        <ns0:nvSpPr>
+          <ns0:cNvPr id="16" name="">
+            <ns1:extLst>
+              <ns1:ext uri="{FF2B5EF4-FFF2-40B4-BE49-F238E27FC236}">
+                <ns3:creationId id="{D0819937-AC7B-49D6-AFE0-F0464F613529}"/>
+              </ns1:ext>
+            </ns1:extLst>
+          </ns0:cNvPr>
+          <ns0:cNvSpPr>
+            <ns1:spLocks noGrp="1"/>
+          </ns0:cNvSpPr>
+          <ns0:nvPr/>
+        </ns0:nvSpPr>
+        <ns0:spPr>
+          <ns1:xfrm>
+            <ns1:off x="609600" y="1295400"/>
+            <ns1:ext cx="10972800" cy="9525"/>
+          </ns1:xfrm>
+          <ns1:prstGeom prst="rect">
+            <ns1:avLst/>
+          </ns1:prstGeom>
+          <ns1:solidFill>
+            <ns1:srgbClr val="CBD5E1"/>
+          </ns1:solidFill>
+          <ns1:ln w="0">
+            <ns1:solidFill>
+              <ns1:srgbClr val="CBD5E1"/>
+            </ns1:solidFill>
+          </ns1:ln>
+        </ns0:spPr>
+      </ns0:sp>
+      <ns0:sp>
+        <ns0:nvSpPr>
+          <ns0:cNvPr id="17" name="slide-number">
+            <ns1:extLst>
+              <ns1:ext uri="{FF2B5EF4-FFF2-40B4-BE49-F238E27FC236}">
+                <ns3:creationId id="{5D6F9718-5DEE-4A65-8210-B8BAE684368C}"/>
+              </ns1:ext>
+            </ns1:extLst>
+          </ns0:cNvPr>
+          <ns0:cNvSpPr>
+            <ns1:spLocks noGrp="1"/>
+          </ns0:cNvSpPr>
+          <ns0:nvPr/>
+        </ns0:nvSpPr>
+        <ns0:spPr>
+          <ns1:xfrm>
+            <ns1:off x="11125200" y="6467475"/>
+            <ns1:ext cx="457200" cy="190500"/>
+          </ns1:xfrm>
+          <ns1:prstGeom prst="rect">
+            <ns1:avLst/>
+          </ns1:prstGeom>
+          <ns1:noFill/>
+          <ns1:ln w="0">
+            <ns1:noFill/>
+          </ns1:ln>
+        </ns0:spPr>
+        <ns0:txBody>
+          <ns1:bodyPr wrap="square" lIns="0" tIns="0" rIns="0" bIns="0" anchor="t">
+            <ns1:noAutofit/>
+          </ns1:bodyPr>
+          <ns1:lstStyle/>
+          <ns1:p>
+            <ns1:pPr>
+              <ns1:defRPr sz="900" b="0">
+                <ns1:solidFill>
+                  <ns1:srgbClr val="64748B"/>
+                </ns1:solidFill>
+                <ns1:latin typeface="Helvetica Neue"/>
+                <ns1:ea typeface="Helvetica Neue"/>
+                <ns1:cs typeface="Helvetica Neue"/>
+              </ns1:defRPr>
+            </ns1:pPr>
+            <ns1:r>
+              <ns1:rPr sz="900" b="0">
+                <ns1:solidFill>
+                  <ns1:srgbClr val="64748B"/>
+                </ns1:solidFill>
+                <ns1:latin typeface="Helvetica Neue"/>
+                <ns1:ea typeface="Helvetica Neue"/>
+                <ns1:cs typeface="Helvetica Neue"/>
+              </ns1:rPr>
+              <ns1:t>03</ns1:t>
+            </ns1:r>
+          </ns1:p>
+        </ns0:txBody>
+      </ns0:sp>
+      <ns0:sp>
+        <ns0:nvSpPr>
+          <ns0:cNvPr id="18" name="layer-summary">
+            <ns1:extLst>
+              <ns1:ext uri="{FF2B5EF4-FFF2-40B4-BE49-F238E27FC236}">
+                <ns3:creationId id="{0A9F361B-F95F-4385-9406-EF6CE668E1D0}"/>
+              </ns1:ext>
+            </ns1:extLst>
+          </ns0:cNvPr>
+          <ns0:cNvSpPr>
+            <ns1:spLocks noGrp="1"/>
+          </ns0:cNvSpPr>
+          <ns0:nvPr/>
+        </ns0:nvSpPr>
+        <ns0:spPr>
+          <ns1:xfrm>
+            <ns1:off x="7886700" y="1885950"/>
+            <ns1:ext cx="3638550" cy="2800350"/>
+          </ns1:xfrm>
+          <ns1:prstGeom prst="rect">
+            <ns1:avLst/>
+          </ns1:prstGeom>
+          <ns1:noFill/>
+          <ns1:ln w="0">
+            <ns1:noFill/>
+          </ns1:ln>
+        </ns0:spPr>
+        <ns0:txBody>
+          <ns1:bodyPr wrap="square" lIns="0" tIns="0" rIns="0" bIns="0" anchor="t">
+            <ns1:noAutofit/>
+          </ns1:bodyPr>
+          <ns1:lstStyle/>
+          <ns1:p>
+            <ns1:pPr>
+              <ns1:defRPr sz="2025" b="0">
+                <ns1:solidFill>
+                  <ns1:srgbClr val="111827"/>
+                </ns1:solidFill>
+                <ns1:latin typeface="Helvetica Neue"/>
+                <ns1:ea typeface="Helvetica Neue"/>
+                <ns1:cs typeface="Helvetica Neue"/>
+              </ns1:defRPr>
+            </ns1:pPr>
+            <ns1:r>
+              <ns1:rPr sz="2025" b="0">
+                <ns1:solidFill>
+                  <ns1:srgbClr val="111827"/>
+                </ns1:solidFill>
+                <ns1:latin typeface="Helvetica Neue"/>
+                <ns1:ea typeface="Helvetica Neue"/>
+                <ns1:cs typeface="Helvetica Neue"/>
+              </ns1:rPr>
+              <ns1:t>Project: cloud administration</ns1:t>
+            </ns1:r>
+          </ns1:p>
+          <ns1:p>
+            <ns1:r>
+              <ns1:t/>
+            </ns1:r>
+          </ns1:p>
+          <ns1:p>
+            <ns1:pPr>
+              <ns1:defRPr sz="2025" b="0">
+                <ns1:solidFill>
+                  <ns1:srgbClr val="111827"/>
+                </ns1:solidFill>
+                <ns1:latin typeface="Helvetica Neue"/>
+                <ns1:ea typeface="Helvetica Neue"/>
+                <ns1:cs typeface="Helvetica Neue"/>
+              </ns1:defRPr>
+            </ns1:pPr>
+            <ns1:r>
+              <ns1:rPr sz="2025" b="0">
+                <ns1:solidFill>
+                  <ns1:srgbClr val="111827"/>
+                </ns1:solidFill>
+                <ns1:latin typeface="Helvetica Neue"/>
+                <ns1:ea typeface="Helvetica Neue"/>
+                <ns1:cs typeface="Helvetica Neue"/>
+              </ns1:rPr>
+              <ns1:t>Cluster: database service</ns1:t>
+            </ns1:r>
+          </ns1:p>
+          <ns1:p>
+            <ns1:r>
+              <ns1:t/>
+            </ns1:r>
+          </ns1:p>
+          <ns1:p>
+            <ns1:pPr>
+              <ns1:defRPr sz="2025" b="0">
+                <ns1:solidFill>
+                  <ns1:srgbClr val="111827"/>
+                </ns1:solidFill>
+                <ns1:latin typeface="Helvetica Neue"/>
+                <ns1:ea typeface="Helvetica Neue"/>
+                <ns1:cs typeface="Helvetica Neue"/>
+              </ns1:defRPr>
+            </ns1:pPr>
+            <ns1:r>
+              <ns1:rPr sz="2025" b="0">
+                <ns1:solidFill>
+                  <ns1:srgbClr val="111827"/>
+                </ns1:solidFill>
+                <ns1:latin typeface="Helvetica Neue"/>
+                <ns1:ea typeface="Helvetica Neue"/>
+                <ns1:cs typeface="Helvetica Neue"/>
+              </ns1:rPr>
+              <ns1:t>Database: collections</ns1:t>
+            </ns1:r>
+          </ns1:p>
+          <ns1:p>
+            <ns1:r>
+              <ns1:t/>
+            </ns1:r>
+          </ns1:p>
+          <ns1:p>
+            <ns1:pPr>
+              <ns1:defRPr sz="2025" b="0">
+                <ns1:solidFill>
+                  <ns1:srgbClr val="111827"/>
+                </ns1:solidFill>
+                <ns1:latin typeface="Helvetica Neue"/>
+                <ns1:ea typeface="Helvetica Neue"/>
+                <ns1:cs typeface="Helvetica Neue"/>
+              </ns1:defRPr>
+            </ns1:pPr>
+            <ns1:r>
+              <ns1:rPr sz="2025" b="0">
+                <ns1:solidFill>
+                  <ns1:srgbClr val="111827"/>
+                </ns1:solidFill>
+                <ns1:latin typeface="Helvetica Neue"/>
+                <ns1:ea typeface="Helvetica Neue"/>
+                <ns1:cs typeface="Helvetica Neue"/>
+              </ns1:rPr>
+              <ns1:t>Collection: documents</ns1:t>
+            </ns1:r>
+          </ns1:p>
+        </ns0:txBody>
+      </ns0:sp>
+      <ns0:sp>
+        <ns0:nvSpPr>
+          <ns0:cNvPr id="19" name="image-meaning">
+            <ns1:extLst>
+              <ns1:ext uri="{FF2B5EF4-FFF2-40B4-BE49-F238E27FC236}">
+                <ns3:creationId id="{C7428690-C788-45E1-9A97-8E1AAA95B521}"/>
+              </ns1:ext>
+            </ns1:extLst>
+          </ns0:cNvPr>
+          <ns0:cNvSpPr>
+            <ns1:spLocks noGrp="1"/>
+          </ns0:cNvSpPr>
+          <ns0:nvPr/>
+        </ns0:nvSpPr>
+        <ns0:spPr>
+          <ns1:xfrm>
+            <ns1:off x="7886700" y="5114925"/>
+            <ns1:ext cx="3638550" cy="1095375"/>
+          </ns1:xfrm>
+          <ns1:prstGeom prst="rect">
+            <ns1:avLst/>
+          </ns1:prstGeom>
+          <ns1:noFill/>
+          <ns1:ln w="0">
+            <ns1:noFill/>
+          </ns1:ln>
+        </ns0:spPr>
+        <ns0:txBody>
+          <ns1:bodyPr wrap="square" lIns="0" tIns="0" rIns="0" bIns="0" anchor="t">
+            <ns1:noAutofit/>
+          </ns1:bodyPr>
+          <ns1:lstStyle/>
+          <ns1:p>
+            <ns1:pPr>
+              <ns1:defRPr sz="1875" b="0">
+                <ns1:solidFill>
+                  <ns1:srgbClr val="111827"/>
+                </ns1:solidFill>
+                <ns1:latin typeface="Helvetica Neue"/>
+                <ns1:ea typeface="Helvetica Neue"/>
+                <ns1:cs typeface="Helvetica Neue"/>
+              </ns1:defRPr>
+            </ns1:pPr>
+            <ns1:r>
+              <ns1:rPr sz="1875" b="0">
+                <ns1:solidFill>
+                  <ns1:srgbClr val="111827"/>
+                </ns1:solidFill>
+                <ns1:latin typeface="Helvetica Neue"/>
+                <ns1:ea typeface="Helvetica Neue"/>
+                <ns1:cs typeface="Helvetica Neue"/>
+              </ns1:rPr>
+              <ns1:t>This capture shows a deployment</ns1:t>
+            </ns1:r>
+          </ns1:p>
+          <ns1:p>
+            <ns1:pPr>
+              <ns1:defRPr sz="1875" b="0">
+                <ns1:solidFill>
+                  <ns1:srgbClr val="111827"/>
+                </ns1:solidFill>
+                <ns1:latin typeface="Helvetica Neue"/>
+                <ns1:ea typeface="Helvetica Neue"/>
+                <ns1:cs typeface="Helvetica Neue"/>
+              </ns1:defRPr>
+            </ns1:pPr>
+            <ns1:r>
+              <ns1:rPr sz="1875" b="0">
+                <ns1:solidFill>
+                  <ns1:srgbClr val="111827"/>
+                </ns1:solidFill>
+                <ns1:latin typeface="Helvetica Neue"/>
+                <ns1:ea typeface="Helvetica Neue"/>
+                <ns1:cs typeface="Helvetica Neue"/>
+              </ns1:rPr>
+              <ns1:t>while Data Explorer requests</ns1:t>
+            </ns1:r>
+          </ns1:p>
+          <ns1:p>
+            <ns1:pPr>
+              <ns1:defRPr sz="1875" b="0">
+                <ns1:solidFill>
+                  <ns1:srgbClr val="111827"/>
+                </ns1:solidFill>
+                <ns1:latin typeface="Helvetica Neue"/>
+                <ns1:ea typeface="Helvetica Neue"/>
+                <ns1:cs typeface="Helvetica Neue"/>
+              </ns1:defRPr>
+            </ns1:pPr>
+            <ns1:r>
+              <ns1:rPr sz="1875" b="0">
+                <ns1:solidFill>
+                  <ns1:srgbClr val="111827"/>
+                </ns1:solidFill>
+                <ns1:latin typeface="Helvetica Neue"/>
+                <ns1:ea typeface="Helvetica Neue"/>
+                <ns1:cs typeface="Helvetica Neue"/>
+              </ns1:rPr>
+              <ns1:t>a connection.</ns1:t>
+            </ns1:r>
+          </ns1:p>
+        </ns0:txBody>
+      </ns0:sp>
+      <ns0:sp>
+        <ns0:nvSpPr>
+          <ns0:cNvPr id="20" name="capture-caption">
+            <ns1:extLst>
+              <ns1:ext uri="{FF2B5EF4-FFF2-40B4-BE49-F238E27FC236}">
+                <ns3:creationId id="{7C80F7F8-7DF6-42B9-A15F-34D0815458E6}"/>
+              </ns1:ext>
+            </ns1:extLst>
+          </ns0:cNvPr>
+          <ns0:cNvSpPr>
+            <ns1:spLocks noGrp="1"/>
+          </ns0:cNvSpPr>
+          <ns0:nvPr/>
+        </ns0:nvSpPr>
+        <ns0:spPr>
+          <ns1:xfrm>
+            <ns1:off x="723900" y="6200775"/>
+            <ns1:ext cx="10668000" cy="285750"/>
+          </ns1:xfrm>
+          <ns1:prstGeom prst="rect">
+            <ns1:avLst/>
+          </ns1:prstGeom>
+          <ns1:noFill/>
+          <ns1:ln w="0">
+            <ns1:noFill/>
+          </ns1:ln>
+        </ns0:spPr>
+        <ns0:txBody>
+          <ns1:bodyPr wrap="square" lIns="0" tIns="0" rIns="0" bIns="0" anchor="t">
+            <ns1:noAutofit/>
+          </ns1:bodyPr>
+          <ns1:lstStyle/>
+          <ns1:p>
+            <ns1:pPr>
+              <ns1:defRPr sz="1575" b="0">
+                <ns1:solidFill>
+                  <ns1:srgbClr val="111827"/>
+                </ns1:solidFill>
+                <ns1:latin typeface="Helvetica Neue"/>
+                <ns1:ea typeface="Helvetica Neue"/>
+                <ns1:cs typeface="Helvetica Neue"/>
+              </ns1:defRPr>
+            </ns1:pPr>
+            <ns1:r>
+              <ns1:rPr sz="1575" b="0">
+                <ns1:solidFill>
+                  <ns1:srgbClr val="111827"/>
+                </ns1:solidFill>
+                <ns1:latin typeface="Helvetica Neue"/>
+                <ns1:ea typeface="Helvetica Neue"/>
+                <ns1:cs typeface="Helvetica Neue"/>
+              </ns1:rPr>
+              <ns1:t>Interface captured August 25, 2026. Names redacted. This is not a successful query result.</ns1:t>
+            </ns1:r>
+          </ns1:p>
+        </ns0:txBody>
+      </ns0:sp>
+    </ns0:spTree>
+    <ns0:extLst>
+      <ns0:ext uri="{BB962C8B-B14F-4D97-AF65-F5344CB8AC3E}">
+        <ns4:creationId val="1655995919"/>
+      </ns0:ext>
+    </ns0:extLst>
+  </ns0:cSld>
+</ns0:sld>
 </file>
 
 <file path=ppt/slides/slide4.xml><?xml version="1.0" encoding="utf-8"?>
@@ -17115,7 +17158,7 @@
           <p:cNvPr id="7" name="eyebrow">
             <a:extLst xmlns:a="http://schemas.openxmlformats.org/drawingml/2006/main">
               <a:ext uri="{FF2B5EF4-FFF2-40B4-BE49-F238E27FC236}">
-                <a16:creationId xmlns:a16="http://schemas.microsoft.com/office/drawing/2014/main" id="{C12D0F63-ECBE-4A5F-A54C-5891ADE71F45}"/>
+                <a16:creationId xmlns:a16="http://schemas.microsoft.com/office/drawing/2014/main" id="{BEE8028A-27CE-4887-8A68-28633240A348}"/>
               </a:ext>
             </a:extLst>
           </p:cNvPr>
@@ -17172,7 +17215,7 @@
           <p:cNvPr id="2" name="slide-title">
             <a:extLst xmlns:a="http://schemas.openxmlformats.org/drawingml/2006/main">
               <a:ext uri="{FF2B5EF4-FFF2-40B4-BE49-F238E27FC236}">
-                <a16:creationId xmlns:a16="http://schemas.microsoft.com/office/drawing/2014/main" id="{64DCBDE8-8AAB-4B3E-BE03-168D407EF276}"/>
+                <a16:creationId xmlns:a16="http://schemas.microsoft.com/office/drawing/2014/main" id="{74C628E3-6E30-43DA-B73F-5D76E5252DB2}"/>
               </a:ext>
             </a:extLst>
           </p:cNvPr>
@@ -17229,7 +17272,7 @@
           <p:cNvPr id="3" name="">
             <a:extLst xmlns:a="http://schemas.openxmlformats.org/drawingml/2006/main">
               <a:ext uri="{FF2B5EF4-FFF2-40B4-BE49-F238E27FC236}">
-                <a16:creationId xmlns:a16="http://schemas.microsoft.com/office/drawing/2014/main" id="{D0C7111F-1FCE-46D6-AE72-153CB09ED31C}"/>
+                <a16:creationId xmlns:a16="http://schemas.microsoft.com/office/drawing/2014/main" id="{476BE8D6-D709-4B27-BB6F-E18D136A51CD}"/>
               </a:ext>
             </a:extLst>
           </p:cNvPr>
@@ -17261,7 +17304,7 @@
           <p:cNvPr id="4" name="slide-number">
             <a:extLst xmlns:a="http://schemas.openxmlformats.org/drawingml/2006/main">
               <a:ext uri="{FF2B5EF4-FFF2-40B4-BE49-F238E27FC236}">
-                <a16:creationId xmlns:a16="http://schemas.microsoft.com/office/drawing/2014/main" id="{90F174F7-225C-4034-A572-D410C8C9FA1C}"/>
+                <a16:creationId xmlns:a16="http://schemas.microsoft.com/office/drawing/2014/main" id="{49448A51-3CB7-4903-8300-8F42B15C2260}"/>
               </a:ext>
             </a:extLst>
           </p:cNvPr>
@@ -17590,7 +17633,7 @@
           <p:cNvPr id="6" name="safe-connection">
             <a:extLst xmlns:a="http://schemas.openxmlformats.org/drawingml/2006/main">
               <a:ext uri="{FF2B5EF4-FFF2-40B4-BE49-F238E27FC236}">
-                <a16:creationId xmlns:a16="http://schemas.microsoft.com/office/drawing/2014/main" id="{EED77129-7E7A-4B4A-8AB9-AC15227826CD}"/>
+                <a16:creationId xmlns:a16="http://schemas.microsoft.com/office/drawing/2014/main" id="{D3716C1A-318E-4B5B-AC66-177730415CA4}"/>
               </a:ext>
             </a:extLst>
           </p:cNvPr>
@@ -17699,7 +17742,7 @@
           <p:cNvPr id="7" name="eyebrow">
             <a:extLst xmlns:a="http://schemas.openxmlformats.org/drawingml/2006/main">
               <a:ext uri="{FF2B5EF4-FFF2-40B4-BE49-F238E27FC236}">
-                <a16:creationId xmlns:a16="http://schemas.microsoft.com/office/drawing/2014/main" id="{E280E038-CFDF-42C7-B142-19F1D6CCEA2A}"/>
+                <a16:creationId xmlns:a16="http://schemas.microsoft.com/office/drawing/2014/main" id="{9FF98E33-076F-4EE1-B67A-FED24AEDDB04}"/>
               </a:ext>
             </a:extLst>
           </p:cNvPr>
@@ -17756,7 +17799,7 @@
           <p:cNvPr id="2" name="slide-title">
             <a:extLst xmlns:a="http://schemas.openxmlformats.org/drawingml/2006/main">
               <a:ext uri="{FF2B5EF4-FFF2-40B4-BE49-F238E27FC236}">
-                <a16:creationId xmlns:a16="http://schemas.microsoft.com/office/drawing/2014/main" id="{414B547A-5988-4033-8D91-66143837C834}"/>
+                <a16:creationId xmlns:a16="http://schemas.microsoft.com/office/drawing/2014/main" id="{3B8075D1-E3A8-44D5-B89B-6C41679ECD37}"/>
               </a:ext>
             </a:extLst>
           </p:cNvPr>
@@ -17813,7 +17856,7 @@
           <p:cNvPr id="3" name="">
             <a:extLst xmlns:a="http://schemas.openxmlformats.org/drawingml/2006/main">
               <a:ext uri="{FF2B5EF4-FFF2-40B4-BE49-F238E27FC236}">
-                <a16:creationId xmlns:a16="http://schemas.microsoft.com/office/drawing/2014/main" id="{378D3D94-4A97-45E6-A1A7-9B9408DF4FB2}"/>
+                <a16:creationId xmlns:a16="http://schemas.microsoft.com/office/drawing/2014/main" id="{58FA3EC7-809E-4815-8F18-F8468F94CC4B}"/>
               </a:ext>
             </a:extLst>
           </p:cNvPr>
@@ -17845,7 +17888,7 @@
           <p:cNvPr id="4" name="slide-number">
             <a:extLst xmlns:a="http://schemas.openxmlformats.org/drawingml/2006/main">
               <a:ext uri="{FF2B5EF4-FFF2-40B4-BE49-F238E27FC236}">
-                <a16:creationId xmlns:a16="http://schemas.microsoft.com/office/drawing/2014/main" id="{EF1445F0-C034-41BF-B957-C68257E1FB73}"/>
+                <a16:creationId xmlns:a16="http://schemas.microsoft.com/office/drawing/2014/main" id="{1F488CFC-56B7-4792-A5FF-1A93B7A84251}"/>
               </a:ext>
             </a:extLst>
           </p:cNvPr>
@@ -18369,7 +18412,7 @@
           <p:cNvPr id="6" name="language-boundary">
             <a:extLst xmlns:a="http://schemas.openxmlformats.org/drawingml/2006/main">
               <a:ext uri="{FF2B5EF4-FFF2-40B4-BE49-F238E27FC236}">
-                <a16:creationId xmlns:a16="http://schemas.microsoft.com/office/drawing/2014/main" id="{F83F9F5B-ABA5-4E0F-93A6-EF124635E4FC}"/>
+                <a16:creationId xmlns:a16="http://schemas.microsoft.com/office/drawing/2014/main" id="{E50910CB-453C-4DDA-8E6B-A6C7432834CF}"/>
               </a:ext>
             </a:extLst>
           </p:cNvPr>
@@ -18478,7 +18521,7 @@
           <p:cNvPr id="7" name="eyebrow">
             <a:extLst xmlns:a="http://schemas.openxmlformats.org/drawingml/2006/main">
               <a:ext uri="{FF2B5EF4-FFF2-40B4-BE49-F238E27FC236}">
-                <a16:creationId xmlns:a16="http://schemas.microsoft.com/office/drawing/2014/main" id="{BED7988B-16E5-4A19-8236-C41118F8AB69}"/>
+                <a16:creationId xmlns:a16="http://schemas.microsoft.com/office/drawing/2014/main" id="{8AEAC8F5-C3C7-4498-9EEB-8BACEC9E532C}"/>
               </a:ext>
             </a:extLst>
           </p:cNvPr>
@@ -18535,7 +18578,7 @@
           <p:cNvPr id="2" name="slide-title">
             <a:extLst xmlns:a="http://schemas.openxmlformats.org/drawingml/2006/main">
               <a:ext uri="{FF2B5EF4-FFF2-40B4-BE49-F238E27FC236}">
-                <a16:creationId xmlns:a16="http://schemas.microsoft.com/office/drawing/2014/main" id="{FDCA3B71-FC73-4377-97DF-F405870B753C}"/>
+                <a16:creationId xmlns:a16="http://schemas.microsoft.com/office/drawing/2014/main" id="{171C5443-F7AC-41DB-8B33-373F9EC9016B}"/>
               </a:ext>
             </a:extLst>
           </p:cNvPr>
@@ -18592,7 +18635,7 @@
           <p:cNvPr id="3" name="">
             <a:extLst xmlns:a="http://schemas.openxmlformats.org/drawingml/2006/main">
               <a:ext uri="{FF2B5EF4-FFF2-40B4-BE49-F238E27FC236}">
-                <a16:creationId xmlns:a16="http://schemas.microsoft.com/office/drawing/2014/main" id="{4C60649A-DFF7-4DC9-BBB3-1A101D4511BA}"/>
+                <a16:creationId xmlns:a16="http://schemas.microsoft.com/office/drawing/2014/main" id="{7205F72F-5222-4612-941B-66D57D8352B8}"/>
               </a:ext>
             </a:extLst>
           </p:cNvPr>
@@ -18624,7 +18667,7 @@
           <p:cNvPr id="4" name="slide-number">
             <a:extLst xmlns:a="http://schemas.openxmlformats.org/drawingml/2006/main">
               <a:ext uri="{FF2B5EF4-FFF2-40B4-BE49-F238E27FC236}">
-                <a16:creationId xmlns:a16="http://schemas.microsoft.com/office/drawing/2014/main" id="{927854B7-2926-429B-A5F0-0CB8E2EDB009}"/>
+                <a16:creationId xmlns:a16="http://schemas.microsoft.com/office/drawing/2014/main" id="{47D32DFC-F337-42FE-A651-FC373511D068}"/>
               </a:ext>
             </a:extLst>
           </p:cNvPr>
@@ -19391,7 +19434,7 @@
           <p:cNvPr id="6" name="fixture-boundary">
             <a:extLst xmlns:a="http://schemas.openxmlformats.org/drawingml/2006/main">
               <a:ext uri="{FF2B5EF4-FFF2-40B4-BE49-F238E27FC236}">
-                <a16:creationId xmlns:a16="http://schemas.microsoft.com/office/drawing/2014/main" id="{2C248D0E-C2D8-426C-AF43-F60DA0E72AEA}"/>
+                <a16:creationId xmlns:a16="http://schemas.microsoft.com/office/drawing/2014/main" id="{73DC0D6B-D5AC-4D90-9812-FAB034E83FC2}"/>
               </a:ext>
             </a:extLst>
           </p:cNvPr>
@@ -19500,7 +19543,7 @@
           <p:cNvPr id="9" name="eyebrow">
             <a:extLst xmlns:a="http://schemas.openxmlformats.org/drawingml/2006/main">
               <a:ext uri="{FF2B5EF4-FFF2-40B4-BE49-F238E27FC236}">
-                <a16:creationId xmlns:a16="http://schemas.microsoft.com/office/drawing/2014/main" id="{884D6694-97BA-49A3-897E-9799A3A100BA}"/>
+                <a16:creationId xmlns:a16="http://schemas.microsoft.com/office/drawing/2014/main" id="{28B06E1F-AEEC-4C88-BED6-01BD3BC723ED}"/>
               </a:ext>
             </a:extLst>
           </p:cNvPr>
@@ -19557,7 +19600,7 @@
           <p:cNvPr id="2" name="slide-title">
             <a:extLst xmlns:a="http://schemas.openxmlformats.org/drawingml/2006/main">
               <a:ext uri="{FF2B5EF4-FFF2-40B4-BE49-F238E27FC236}">
-                <a16:creationId xmlns:a16="http://schemas.microsoft.com/office/drawing/2014/main" id="{23C7123B-DAE1-4A4D-9F9B-06A3A20B1EB9}"/>
+                <a16:creationId xmlns:a16="http://schemas.microsoft.com/office/drawing/2014/main" id="{2AE2C60B-2364-450D-B893-2B3436F1B29E}"/>
               </a:ext>
             </a:extLst>
           </p:cNvPr>
@@ -19614,7 +19657,7 @@
           <p:cNvPr id="3" name="">
             <a:extLst xmlns:a="http://schemas.openxmlformats.org/drawingml/2006/main">
               <a:ext uri="{FF2B5EF4-FFF2-40B4-BE49-F238E27FC236}">
-                <a16:creationId xmlns:a16="http://schemas.microsoft.com/office/drawing/2014/main" id="{0ACE75EF-0D6E-4977-A182-389C7BBDF3B8}"/>
+                <a16:creationId xmlns:a16="http://schemas.microsoft.com/office/drawing/2014/main" id="{3C8A8568-046A-4957-8AF6-E386F51DB264}"/>
               </a:ext>
             </a:extLst>
           </p:cNvPr>
@@ -19646,7 +19689,7 @@
           <p:cNvPr id="4" name="slide-number">
             <a:extLst xmlns:a="http://schemas.openxmlformats.org/drawingml/2006/main">
               <a:ext uri="{FF2B5EF4-FFF2-40B4-BE49-F238E27FC236}">
-                <a16:creationId xmlns:a16="http://schemas.microsoft.com/office/drawing/2014/main" id="{9F00D8BC-E459-413B-8966-127EA38E3472}"/>
+                <a16:creationId xmlns:a16="http://schemas.microsoft.com/office/drawing/2014/main" id="{378E48B0-61D4-4DDE-BCA6-8137D30C1A43}"/>
               </a:ext>
             </a:extLst>
           </p:cNvPr>
@@ -19703,7 +19746,7 @@
           <p:cNvPr id="5" name="">
             <a:extLst xmlns:a="http://schemas.openxmlformats.org/drawingml/2006/main">
               <a:ext uri="{FF2B5EF4-FFF2-40B4-BE49-F238E27FC236}">
-                <a16:creationId xmlns:a16="http://schemas.microsoft.com/office/drawing/2014/main" id="{B26CF355-E7D5-4AB0-A753-A505A95E3833}"/>
+                <a16:creationId xmlns:a16="http://schemas.microsoft.com/office/drawing/2014/main" id="{04BA88F7-7854-4194-9A96-A1101E429B8A}"/>
               </a:ext>
             </a:extLst>
           </p:cNvPr>
@@ -19735,7 +19778,7 @@
           <p:cNvPr id="6" name="python-filter">
             <a:extLst xmlns:a="http://schemas.openxmlformats.org/drawingml/2006/main">
               <a:ext uri="{FF2B5EF4-FFF2-40B4-BE49-F238E27FC236}">
-                <a16:creationId xmlns:a16="http://schemas.microsoft.com/office/drawing/2014/main" id="{C9DC612C-2F18-4F47-8ABB-CD8EAD1E6458}"/>
+                <a16:creationId xmlns:a16="http://schemas.microsoft.com/office/drawing/2014/main" id="{F9738BCE-7A2E-4FE6-AD98-0E7CF106A5DB}"/>
               </a:ext>
             </a:extLst>
           </p:cNvPr>
@@ -19930,7 +19973,7 @@
           <p:cNvPr id="7" name="filter-result">
             <a:extLst xmlns:a="http://schemas.openxmlformats.org/drawingml/2006/main">
               <a:ext uri="{FF2B5EF4-FFF2-40B4-BE49-F238E27FC236}">
-                <a16:creationId xmlns:a16="http://schemas.microsoft.com/office/drawing/2014/main" id="{03A6BC36-B420-4AF0-A614-42C3D6FACCF0}"/>
+                <a16:creationId xmlns:a16="http://schemas.microsoft.com/office/drawing/2014/main" id="{40CB36B0-246F-4F7D-8D51-84910660DBBC}"/>
               </a:ext>
             </a:extLst>
           </p:cNvPr>
@@ -19987,7 +20030,7 @@
           <p:cNvPr id="8" name="filter-explain">
             <a:extLst xmlns:a="http://schemas.openxmlformats.org/drawingml/2006/main">
               <a:ext uri="{FF2B5EF4-FFF2-40B4-BE49-F238E27FC236}">
-                <a16:creationId xmlns:a16="http://schemas.microsoft.com/office/drawing/2014/main" id="{24067A11-E0A0-4585-9771-F21F452C5E34}"/>
+                <a16:creationId xmlns:a16="http://schemas.microsoft.com/office/drawing/2014/main" id="{29B999D0-5E7E-4A2F-83A7-E27FB658E21F}"/>
               </a:ext>
             </a:extLst>
           </p:cNvPr>
@@ -20096,7 +20139,7 @@
           <p:cNvPr id="9" name="eyebrow">
             <a:extLst xmlns:a="http://schemas.openxmlformats.org/drawingml/2006/main">
               <a:ext uri="{FF2B5EF4-FFF2-40B4-BE49-F238E27FC236}">
-                <a16:creationId xmlns:a16="http://schemas.microsoft.com/office/drawing/2014/main" id="{579EE106-0E2E-43C7-BAA7-430F5D315975}"/>
+                <a16:creationId xmlns:a16="http://schemas.microsoft.com/office/drawing/2014/main" id="{84DE8816-EB66-428B-8818-7B3AED9F4FC0}"/>
               </a:ext>
             </a:extLst>
           </p:cNvPr>
@@ -20153,7 +20196,7 @@
           <p:cNvPr id="2" name="slide-title">
             <a:extLst xmlns:a="http://schemas.openxmlformats.org/drawingml/2006/main">
               <a:ext uri="{FF2B5EF4-FFF2-40B4-BE49-F238E27FC236}">
-                <a16:creationId xmlns:a16="http://schemas.microsoft.com/office/drawing/2014/main" id="{900CAFF6-12F8-4A04-B401-034F03F9B442}"/>
+                <a16:creationId xmlns:a16="http://schemas.microsoft.com/office/drawing/2014/main" id="{F1251CCC-CC57-4C06-96B3-44D4697832FB}"/>
               </a:ext>
             </a:extLst>
           </p:cNvPr>
@@ -20210,7 +20253,7 @@
           <p:cNvPr id="3" name="">
             <a:extLst xmlns:a="http://schemas.openxmlformats.org/drawingml/2006/main">
               <a:ext uri="{FF2B5EF4-FFF2-40B4-BE49-F238E27FC236}">
-                <a16:creationId xmlns:a16="http://schemas.microsoft.com/office/drawing/2014/main" id="{BEE4BEFB-4C46-4F2F-A32F-281F998A1C79}"/>
+                <a16:creationId xmlns:a16="http://schemas.microsoft.com/office/drawing/2014/main" id="{7334C744-E59D-4AC1-B2A2-0AEC8E17DD8D}"/>
               </a:ext>
             </a:extLst>
           </p:cNvPr>
@@ -20242,7 +20285,7 @@
           <p:cNvPr id="4" name="slide-number">
             <a:extLst xmlns:a="http://schemas.openxmlformats.org/drawingml/2006/main">
               <a:ext uri="{FF2B5EF4-FFF2-40B4-BE49-F238E27FC236}">
-                <a16:creationId xmlns:a16="http://schemas.microsoft.com/office/drawing/2014/main" id="{AAB725AD-4220-459D-A036-99EF23FFD2A1}"/>
+                <a16:creationId xmlns:a16="http://schemas.microsoft.com/office/drawing/2014/main" id="{7B2D2040-E8EE-4B2A-9A3C-745D3AF6FED6}"/>
               </a:ext>
             </a:extLst>
           </p:cNvPr>
@@ -20299,7 +20342,7 @@
           <p:cNvPr id="5" name="">
             <a:extLst xmlns:a="http://schemas.openxmlformats.org/drawingml/2006/main">
               <a:ext uri="{FF2B5EF4-FFF2-40B4-BE49-F238E27FC236}">
-                <a16:creationId xmlns:a16="http://schemas.microsoft.com/office/drawing/2014/main" id="{3ADFFCBD-F2B9-486B-8E5D-DFD11FEFADA7}"/>
+                <a16:creationId xmlns:a16="http://schemas.microsoft.com/office/drawing/2014/main" id="{E65F9AE9-DD55-4685-AE71-040E12078810}"/>
               </a:ext>
             </a:extLst>
           </p:cNvPr>
@@ -20331,7 +20374,7 @@
           <p:cNvPr id="6" name="python-sort">
             <a:extLst xmlns:a="http://schemas.openxmlformats.org/drawingml/2006/main">
               <a:ext uri="{FF2B5EF4-FFF2-40B4-BE49-F238E27FC236}">
-                <a16:creationId xmlns:a16="http://schemas.microsoft.com/office/drawing/2014/main" id="{0AEC498B-CB31-493A-B7AD-CA5A095A50C6}"/>
+                <a16:creationId xmlns:a16="http://schemas.microsoft.com/office/drawing/2014/main" id="{D6846ABF-4F6D-439A-9CFF-C98C374EDE17}"/>
               </a:ext>
             </a:extLst>
           </p:cNvPr>
@@ -20508,7 +20551,7 @@
           <p:cNvPr id="7" name="sort-result">
             <a:extLst xmlns:a="http://schemas.openxmlformats.org/drawingml/2006/main">
               <a:ext uri="{FF2B5EF4-FFF2-40B4-BE49-F238E27FC236}">
-                <a16:creationId xmlns:a16="http://schemas.microsoft.com/office/drawing/2014/main" id="{BA485B66-EE47-4D8F-8811-53B242F73CE9}"/>
+                <a16:creationId xmlns:a16="http://schemas.microsoft.com/office/drawing/2014/main" id="{6D8EC3F4-BF1E-497E-9FAB-6321C8718B13}"/>
               </a:ext>
             </a:extLst>
           </p:cNvPr>
@@ -20588,7 +20631,7 @@
           <p:cNvPr id="8" name="cursor-explain">
             <a:extLst xmlns:a="http://schemas.openxmlformats.org/drawingml/2006/main">
               <a:ext uri="{FF2B5EF4-FFF2-40B4-BE49-F238E27FC236}">
-                <a16:creationId xmlns:a16="http://schemas.microsoft.com/office/drawing/2014/main" id="{B572393D-4074-4D32-9C3B-0CA374C9E60D}"/>
+                <a16:creationId xmlns:a16="http://schemas.microsoft.com/office/drawing/2014/main" id="{EB5C5160-557A-43B4-833C-D6F3DEE77D21}"/>
               </a:ext>
             </a:extLst>
           </p:cNvPr>
@@ -20674,7 +20717,7 @@
           <p:cNvPr id="8" name="eyebrow">
             <a:extLst xmlns:a="http://schemas.openxmlformats.org/drawingml/2006/main">
               <a:ext uri="{FF2B5EF4-FFF2-40B4-BE49-F238E27FC236}">
-                <a16:creationId xmlns:a16="http://schemas.microsoft.com/office/drawing/2014/main" id="{583C4147-0E23-45B7-9D66-1687ADC40D3D}"/>
+                <a16:creationId xmlns:a16="http://schemas.microsoft.com/office/drawing/2014/main" id="{356A2580-594A-4A78-9A56-3B9A54EDA5E3}"/>
               </a:ext>
             </a:extLst>
           </p:cNvPr>
@@ -20731,7 +20774,7 @@
           <p:cNvPr id="2" name="slide-title">
             <a:extLst xmlns:a="http://schemas.openxmlformats.org/drawingml/2006/main">
               <a:ext uri="{FF2B5EF4-FFF2-40B4-BE49-F238E27FC236}">
-                <a16:creationId xmlns:a16="http://schemas.microsoft.com/office/drawing/2014/main" id="{196FF715-0B44-4957-A43D-F9481E09D315}"/>
+                <a16:creationId xmlns:a16="http://schemas.microsoft.com/office/drawing/2014/main" id="{BAB0D530-969C-4D72-A3F2-8B53B34AA033}"/>
               </a:ext>
             </a:extLst>
           </p:cNvPr>
@@ -20788,7 +20831,7 @@
           <p:cNvPr id="3" name="">
             <a:extLst xmlns:a="http://schemas.openxmlformats.org/drawingml/2006/main">
               <a:ext uri="{FF2B5EF4-FFF2-40B4-BE49-F238E27FC236}">
-                <a16:creationId xmlns:a16="http://schemas.microsoft.com/office/drawing/2014/main" id="{50477220-E346-47E2-AB9A-AD12B48A8772}"/>
+                <a16:creationId xmlns:a16="http://schemas.microsoft.com/office/drawing/2014/main" id="{CFA252F1-8A47-44CD-AB33-2470728B8A16}"/>
               </a:ext>
             </a:extLst>
           </p:cNvPr>
@@ -20820,7 +20863,7 @@
           <p:cNvPr id="4" name="slide-number">
             <a:extLst xmlns:a="http://schemas.openxmlformats.org/drawingml/2006/main">
               <a:ext uri="{FF2B5EF4-FFF2-40B4-BE49-F238E27FC236}">
-                <a16:creationId xmlns:a16="http://schemas.microsoft.com/office/drawing/2014/main" id="{87294949-21BF-4C9E-8080-A893AFBA0A5A}"/>
+                <a16:creationId xmlns:a16="http://schemas.microsoft.com/office/drawing/2014/main" id="{919FE9A9-38F9-4075-9658-82E89FE956BC}"/>
               </a:ext>
             </a:extLst>
           </p:cNvPr>
@@ -20877,7 +20920,7 @@
           <p:cNvPr id="5" name="">
             <a:extLst xmlns:a="http://schemas.openxmlformats.org/drawingml/2006/main">
               <a:ext uri="{FF2B5EF4-FFF2-40B4-BE49-F238E27FC236}">
-                <a16:creationId xmlns:a16="http://schemas.microsoft.com/office/drawing/2014/main" id="{DEB283F2-522B-4420-8C87-43B25FF2D41B}"/>
+                <a16:creationId xmlns:a16="http://schemas.microsoft.com/office/drawing/2014/main" id="{5BEAD340-40BD-4C22-8B5B-0D54FE217215}"/>
               </a:ext>
             </a:extLst>
           </p:cNvPr>
@@ -20909,7 +20952,7 @@
           <p:cNvPr id="6" name="python-nested">
             <a:extLst xmlns:a="http://schemas.openxmlformats.org/drawingml/2006/main">
               <a:ext uri="{FF2B5EF4-FFF2-40B4-BE49-F238E27FC236}">
-                <a16:creationId xmlns:a16="http://schemas.microsoft.com/office/drawing/2014/main" id="{23A0E8AB-B347-41F3-BADD-169A6685014F}"/>
+                <a16:creationId xmlns:a16="http://schemas.microsoft.com/office/drawing/2014/main" id="{160E6700-A35E-4563-A540-D2A5FD0F75C8}"/>
               </a:ext>
             </a:extLst>
           </p:cNvPr>
@@ -21132,7 +21175,7 @@
           <p:cNvPr id="7" name="nested-result">
             <a:extLst xmlns:a="http://schemas.openxmlformats.org/drawingml/2006/main">
               <a:ext uri="{FF2B5EF4-FFF2-40B4-BE49-F238E27FC236}">
-                <a16:creationId xmlns:a16="http://schemas.microsoft.com/office/drawing/2014/main" id="{41E188A8-C0DB-4F4C-9E53-1BD273A1C7CA}"/>
+                <a16:creationId xmlns:a16="http://schemas.microsoft.com/office/drawing/2014/main" id="{A34FC102-C139-4B8D-9DA8-9799C2F06B08}"/>
               </a:ext>
             </a:extLst>
           </p:cNvPr>
